--- a/public/fun/pack/pptx/review/보장점검양식_46_본인점검_새벽시장.pptx
+++ b/public/fun/pack/pptx/review/보장점검양식_46_본인점검_새벽시장.pptx
@@ -3286,6 +3286,14 @@
 <file path=ppt/slides/slide1.xml><?xml version="1.0" encoding="utf-8"?>
 <p:sld xmlns:a="http://schemas.openxmlformats.org/drawingml/2006/main" xmlns:p="http://schemas.openxmlformats.org/presentationml/2006/main" xmlns:r="http://schemas.openxmlformats.org/officeDocument/2006/relationships">
   <p:cSld>
+    <p:bg>
+      <p:bgPr>
+        <a:solidFill>
+          <a:srgbClr val="D5EEF6"/>
+        </a:solidFill>
+        <a:effectLst/>
+      </p:bgPr>
+    </p:bg>
     <p:spTree>
       <p:nvGrpSpPr>
         <p:cNvPr id="1" name=""/>
@@ -3293,30 +3301,102 @@
         <p:nvPr/>
       </p:nvGrpSpPr>
       <p:grpSpPr/>
-      <p:pic>
-        <p:nvPicPr>
-          <p:cNvPr id="3" name="표지 그림" descr="review-46.jpg"/>
-          <p:cNvPicPr>
-            <a:picLocks noChangeAspect="1"/>
-          </p:cNvPicPr>
+      <p:sp>
+        <p:nvSpPr>
+          <p:cNvPr id="3" name="장식"/>
+          <p:cNvSpPr/>
           <p:nvPr/>
-        </p:nvPicPr>
-        <p:blipFill>
-          <a:blip r:embed="rId2"/>
-          <a:stretch>
-            <a:fillRect/>
-          </a:stretch>
-        </p:blipFill>
-        <p:spPr>
-          <a:xfrm>
-            <a:off x="0" y="0"/>
-            <a:ext cx="12191695" cy="6858000"/>
+        </p:nvSpPr>
+        <p:spPr>
+          <a:xfrm>
+            <a:off x="6339681" y="137159"/>
+            <a:ext cx="6583680" cy="6583680"/>
+          </a:xfrm>
+          <a:prstGeom prst="ellipse">
+            <a:avLst/>
+          </a:prstGeom>
+          <a:solidFill>
+            <a:srgbClr val="ADDBEB"/>
+          </a:solidFill>
+          <a:ln>
+            <a:noFill/>
+          </a:ln>
+        </p:spPr>
+        <p:txBody>
+          <a:bodyPr rtlCol="0" anchor="ctr"/>
+          <a:lstStyle/>
+          <a:p>
+            <a:pPr algn="ctr"/>
+          </a:p>
+        </p:txBody>
+      </p:sp>
+      <p:sp>
+        <p:nvSpPr>
+          <p:cNvPr id="4" name="장식"/>
+          <p:cNvSpPr/>
+          <p:nvPr/>
+        </p:nvSpPr>
+        <p:spPr>
+          <a:xfrm>
+            <a:off x="7315017" y="1325880"/>
+            <a:ext cx="4206240" cy="4206240"/>
+          </a:xfrm>
+          <a:prstGeom prst="ellipse">
+            <a:avLst/>
+          </a:prstGeom>
+          <a:solidFill>
+            <a:srgbClr val="FFFFFF"/>
+          </a:solidFill>
+          <a:ln>
+            <a:noFill/>
+          </a:ln>
+        </p:spPr>
+        <p:txBody>
+          <a:bodyPr rtlCol="0" anchor="ctr"/>
+          <a:lstStyle/>
+          <a:p>
+            <a:pPr algn="ctr"/>
+          </a:p>
+        </p:txBody>
+      </p:sp>
+      <p:sp>
+        <p:nvSpPr>
+          <p:cNvPr id="5" name="라벨"/>
+          <p:cNvSpPr txBox="1"/>
+          <p:nvPr/>
+        </p:nvSpPr>
+        <p:spPr>
+          <a:xfrm>
+            <a:off x="822960" y="2148840"/>
+            <a:ext cx="5608179" cy="274320"/>
           </a:xfrm>
           <a:prstGeom prst="rect">
             <a:avLst/>
           </a:prstGeom>
-        </p:spPr>
-      </p:pic>
+          <a:noFill/>
+        </p:spPr>
+        <p:txBody>
+          <a:bodyPr wrap="square" lIns="54864" rIns="54864" tIns="27432" bIns="27432" anchor="t">
+            <a:noAutofit/>
+          </a:bodyPr>
+          <a:lstStyle/>
+          <a:p>
+            <a:pPr algn="l">
+              <a:lnSpc>
+                <a:spcPct val="115000"/>
+              </a:lnSpc>
+            </a:pPr>
+            <a:r>
+              <a:rPr sz="1000" b="1" i="0" spc="250">
+                <a:solidFill>
+                  <a:srgbClr val="26231F"/>
+                </a:solidFill>
+              </a:rPr>
+              <a:t>INSURANCE CHECK</a:t>
+            </a:r>
+          </a:p>
+        </p:txBody>
+      </p:sp>
       <p:sp>
         <p:nvSpPr>
           <p:cNvPr id="2" name="Title 1"/>
@@ -3329,8 +3409,8 @@
         </p:nvSpPr>
         <p:spPr>
           <a:xfrm>
-            <a:off x="853418" y="2057400"/>
-            <a:ext cx="6095847" cy="1554480"/>
+            <a:off x="822960" y="2606040"/>
+            <a:ext cx="5608179" cy="1188720"/>
           </a:xfrm>
         </p:spPr>
         <p:txBody>
@@ -3347,7 +3427,7 @@
             <a:r>
               <a:rPr sz="3600" b="1" i="0">
                 <a:solidFill>
-                  <a:srgbClr val="253A41"/>
+                  <a:srgbClr val="26231F"/>
                 </a:solidFill>
               </a:rPr>
               <a:t>우리 보험 점검 시간</a:t>
@@ -3357,14 +3437,14 @@
       </p:sp>
       <p:sp>
         <p:nvSpPr>
-          <p:cNvPr id="4" name="한 줄 문구"/>
+          <p:cNvPr id="6" name="한 줄 문구"/>
           <p:cNvSpPr txBox="1"/>
           <p:nvPr/>
         </p:nvSpPr>
         <p:spPr>
           <a:xfrm>
-            <a:off x="853418" y="3749039"/>
-            <a:ext cx="6095847" cy="822960"/>
+            <a:off x="822960" y="3886200"/>
+            <a:ext cx="5608179" cy="822960"/>
           </a:xfrm>
           <a:prstGeom prst="rect">
             <a:avLst/>
@@ -3383,9 +3463,9 @@
               </a:lnSpc>
             </a:pPr>
             <a:r>
-              <a:rPr sz="1700" b="0" i="1">
+              <a:rPr sz="1700" b="0" i="0">
                 <a:solidFill>
-                  <a:srgbClr val="253A41"/>
+                  <a:srgbClr val="26231F"/>
                 </a:solidFill>
               </a:rPr>
               <a:t>이름과 증권 번호를 한 줄씩 옮겨 적습니다</a:t>
@@ -3395,14 +3475,14 @@
       </p:sp>
       <p:sp>
         <p:nvSpPr>
-          <p:cNvPr id="5" name="안내 문구"/>
+          <p:cNvPr id="7" name="안내 문구"/>
           <p:cNvSpPr txBox="1"/>
           <p:nvPr/>
         </p:nvSpPr>
         <p:spPr>
           <a:xfrm>
-            <a:off x="853418" y="4617720"/>
-            <a:ext cx="6095847" cy="914400"/>
+            <a:off x="822960" y="4754880"/>
+            <a:ext cx="5608179" cy="914400"/>
           </a:xfrm>
           <a:prstGeom prst="rect">
             <a:avLst/>
@@ -3423,10 +3503,10 @@
             <a:r>
               <a:rPr sz="1400" b="0" i="0">
                 <a:solidFill>
-                  <a:srgbClr val="666666"/>
+                  <a:srgbClr val="26231F"/>
                 </a:solidFill>
               </a:rPr>
-              <a:t>본인 점검 · 2027. 00. 00</a:t>
+              <a:t>본인 점검 · 날짜 입력</a:t>
             </a:r>
           </a:p>
           <a:p>
@@ -3438,7 +3518,7 @@
             <a:r>
               <a:rPr sz="1400" b="0" i="0">
                 <a:solidFill>
-                  <a:srgbClr val="666666"/>
+                  <a:srgbClr val="26231F"/>
                 </a:solidFill>
               </a:rPr>
               <a:t>가입 내용을 정리하고 함께 확인하는 양식</a:t>
@@ -3480,14 +3560,112 @@
         </p:nvSpPr>
         <p:spPr>
           <a:xfrm>
-            <a:off x="0" y="384048"/>
-            <a:ext cx="9509522" cy="896112"/>
-          </a:xfrm>
-          <a:prstGeom prst="homePlate">
+            <a:off x="0" y="6565392"/>
+            <a:ext cx="12191695" cy="292608"/>
+          </a:xfrm>
+          <a:prstGeom prst="rect">
             <a:avLst/>
           </a:prstGeom>
           <a:solidFill>
-            <a:srgbClr val="497483"/>
+            <a:srgbClr val="ADDBEB"/>
+          </a:solidFill>
+          <a:ln>
+            <a:noFill/>
+          </a:ln>
+        </p:spPr>
+        <p:txBody>
+          <a:bodyPr rtlCol="0" anchor="ctr"/>
+          <a:lstStyle/>
+          <a:p>
+            <a:pPr algn="ctr"/>
+          </a:p>
+        </p:txBody>
+      </p:sp>
+      <p:sp>
+        <p:nvSpPr>
+          <p:cNvPr id="4" name="장식"/>
+          <p:cNvSpPr/>
+          <p:nvPr/>
+        </p:nvSpPr>
+        <p:spPr>
+          <a:xfrm>
+            <a:off x="640080" y="566928"/>
+            <a:ext cx="64008" cy="868680"/>
+          </a:xfrm>
+          <a:prstGeom prst="roundRect">
+            <a:avLst>
+              <a:gd name="adj" fmla="val 50000"/>
+            </a:avLst>
+          </a:prstGeom>
+          <a:solidFill>
+            <a:srgbClr val="98CFE1"/>
+          </a:solidFill>
+          <a:ln>
+            <a:noFill/>
+          </a:ln>
+        </p:spPr>
+        <p:txBody>
+          <a:bodyPr rtlCol="0" anchor="ctr"/>
+          <a:lstStyle/>
+          <a:p>
+            <a:pPr algn="ctr"/>
+          </a:p>
+        </p:txBody>
+      </p:sp>
+      <p:sp>
+        <p:nvSpPr>
+          <p:cNvPr id="5" name="상단 라벨"/>
+          <p:cNvSpPr txBox="1"/>
+          <p:nvPr/>
+        </p:nvSpPr>
+        <p:spPr>
+          <a:xfrm>
+            <a:off x="868680" y="274320"/>
+            <a:ext cx="5486400" cy="274320"/>
+          </a:xfrm>
+          <a:prstGeom prst="rect">
+            <a:avLst/>
+          </a:prstGeom>
+          <a:noFill/>
+        </p:spPr>
+        <p:txBody>
+          <a:bodyPr wrap="square" lIns="54864" rIns="54864" tIns="27432" bIns="27432" anchor="ctr">
+            <a:noAutofit/>
+          </a:bodyPr>
+          <a:lstStyle/>
+          <a:p>
+            <a:pPr algn="l">
+              <a:lnSpc>
+                <a:spcPct val="115000"/>
+              </a:lnSpc>
+            </a:pPr>
+            <a:r>
+              <a:rPr sz="900" b="1" i="0" spc="250">
+                <a:solidFill>
+                  <a:srgbClr val="8E8780"/>
+                </a:solidFill>
+              </a:rPr>
+              <a:t>INSURANCE CHECK</a:t>
+            </a:r>
+          </a:p>
+        </p:txBody>
+      </p:sp>
+      <p:sp>
+        <p:nvSpPr>
+          <p:cNvPr id="6" name="포인트"/>
+          <p:cNvSpPr/>
+          <p:nvPr/>
+        </p:nvSpPr>
+        <p:spPr>
+          <a:xfrm rot="18900000">
+            <a:off x="11167567" y="667512"/>
+            <a:ext cx="310896" cy="310896"/>
+          </a:xfrm>
+          <a:prstGeom prst="teardrop">
+            <a:avLst/>
+          </a:prstGeom>
+          <a:solidFill>
+            <a:srgbClr val="ADDBEB"/>
           </a:solidFill>
           <a:ln>
             <a:noFill/>
@@ -3513,8 +3691,8 @@
         </p:nvSpPr>
         <p:spPr>
           <a:xfrm>
-            <a:off x="640080" y="411480"/>
-            <a:ext cx="8412242" cy="822960"/>
+            <a:off x="868680" y="566928"/>
+            <a:ext cx="9448495" cy="868680"/>
           </a:xfrm>
         </p:spPr>
         <p:txBody>
@@ -3531,7 +3709,7 @@
             <a:r>
               <a:rPr sz="3000" b="1" i="0">
                 <a:solidFill>
-                  <a:srgbClr val="FFFFFF"/>
+                  <a:srgbClr val="26231F"/>
                 </a:solidFill>
               </a:rPr>
               <a:t>점검 대상 현황</a:t>
@@ -3541,14 +3719,14 @@
       </p:sp>
       <p:graphicFrame>
         <p:nvGraphicFramePr>
-          <p:cNvPr id="4" name="표"/>
+          <p:cNvPr id="7" name="표"/>
           <p:cNvGraphicFramePr>
             <a:graphicFrameLocks noGrp="1"/>
           </p:cNvGraphicFramePr>
           <p:nvPr/>
         </p:nvGraphicFramePr>
         <p:xfrm>
-          <a:off x="640080" y="1645920"/>
+          <a:off x="640080" y="1783080"/>
           <a:ext cx="10911534" cy="3657600"/>
         </p:xfrm>
         <a:graphic>
@@ -3571,7 +3749,7 @@
                       <a:r>
                         <a:rPr sz="1600" b="1">
                           <a:solidFill>
-                            <a:srgbClr val="FFFFFF"/>
+                            <a:srgbClr val="26231F"/>
                           </a:solidFill>
                         </a:rPr>
                         <a:t>구분</a:t>
@@ -3581,30 +3759,30 @@
                   <a:tcPr anchor="ctr" marL="73152" marR="73152">
                     <a:lnL w="9525" cap="flat" cmpd="sng" algn="ctr">
                       <a:solidFill>
-                        <a:srgbClr val="497483"/>
+                        <a:srgbClr val="98CFE1"/>
                       </a:solidFill>
                       <a:prstDash val="solid"/>
                     </a:lnL>
                     <a:lnR w="9525" cap="flat" cmpd="sng" algn="ctr">
                       <a:solidFill>
-                        <a:srgbClr val="497483"/>
+                        <a:srgbClr val="98CFE1"/>
                       </a:solidFill>
                       <a:prstDash val="solid"/>
                     </a:lnR>
                     <a:lnT w="9525" cap="flat" cmpd="sng" algn="ctr">
                       <a:solidFill>
-                        <a:srgbClr val="497483"/>
+                        <a:srgbClr val="98CFE1"/>
                       </a:solidFill>
                       <a:prstDash val="solid"/>
                     </a:lnT>
                     <a:lnB w="9525" cap="flat" cmpd="sng" algn="ctr">
                       <a:solidFill>
-                        <a:srgbClr val="497483"/>
+                        <a:srgbClr val="98CFE1"/>
                       </a:solidFill>
                       <a:prstDash val="solid"/>
                     </a:lnB>
                     <a:solidFill>
-                      <a:srgbClr val="497483"/>
+                      <a:srgbClr val="98CFE1"/>
                     </a:solidFill>
                   </a:tcPr>
                 </a:tc>
@@ -3617,7 +3795,7 @@
                       <a:r>
                         <a:rPr sz="1600" b="1">
                           <a:solidFill>
-                            <a:srgbClr val="FFFFFF"/>
+                            <a:srgbClr val="26231F"/>
                           </a:solidFill>
                         </a:rPr>
                         <a:t>내용</a:t>
@@ -3627,30 +3805,30 @@
                   <a:tcPr anchor="ctr" marL="73152" marR="73152">
                     <a:lnL w="9525" cap="flat" cmpd="sng" algn="ctr">
                       <a:solidFill>
-                        <a:srgbClr val="497483"/>
+                        <a:srgbClr val="98CFE1"/>
                       </a:solidFill>
                       <a:prstDash val="solid"/>
                     </a:lnL>
                     <a:lnR w="9525" cap="flat" cmpd="sng" algn="ctr">
                       <a:solidFill>
-                        <a:srgbClr val="497483"/>
+                        <a:srgbClr val="98CFE1"/>
                       </a:solidFill>
                       <a:prstDash val="solid"/>
                     </a:lnR>
                     <a:lnT w="9525" cap="flat" cmpd="sng" algn="ctr">
                       <a:solidFill>
-                        <a:srgbClr val="497483"/>
+                        <a:srgbClr val="98CFE1"/>
                       </a:solidFill>
                       <a:prstDash val="solid"/>
                     </a:lnT>
                     <a:lnB w="9525" cap="flat" cmpd="sng" algn="ctr">
                       <a:solidFill>
-                        <a:srgbClr val="497483"/>
+                        <a:srgbClr val="98CFE1"/>
                       </a:solidFill>
                       <a:prstDash val="solid"/>
                     </a:lnB>
                     <a:solidFill>
-                      <a:srgbClr val="497483"/>
+                      <a:srgbClr val="98CFE1"/>
                     </a:solidFill>
                   </a:tcPr>
                 </a:tc>
@@ -3665,7 +3843,7 @@
                       <a:r>
                         <a:rPr sz="1600" b="1">
                           <a:solidFill>
-                            <a:srgbClr val="253A41"/>
+                            <a:srgbClr val="274149"/>
                           </a:solidFill>
                         </a:rPr>
                         <a:t>이름</a:t>
@@ -3675,30 +3853,30 @@
                   <a:tcPr anchor="ctr" marL="73152" marR="73152">
                     <a:lnL w="9525" cap="flat" cmpd="sng" algn="ctr">
                       <a:solidFill>
-                        <a:srgbClr val="D6E5EA"/>
+                        <a:srgbClr val="D5EEF6"/>
                       </a:solidFill>
                       <a:prstDash val="solid"/>
                     </a:lnL>
                     <a:lnR w="9525" cap="flat" cmpd="sng" algn="ctr">
                       <a:solidFill>
-                        <a:srgbClr val="D6E5EA"/>
+                        <a:srgbClr val="D5EEF6"/>
                       </a:solidFill>
                       <a:prstDash val="solid"/>
                     </a:lnR>
                     <a:lnT w="9525" cap="flat" cmpd="sng" algn="ctr">
                       <a:solidFill>
-                        <a:srgbClr val="D6E5EA"/>
+                        <a:srgbClr val="D5EEF6"/>
                       </a:solidFill>
                       <a:prstDash val="solid"/>
                     </a:lnT>
                     <a:lnB w="9525" cap="flat" cmpd="sng" algn="ctr">
                       <a:solidFill>
-                        <a:srgbClr val="D6E5EA"/>
+                        <a:srgbClr val="D5EEF6"/>
                       </a:solidFill>
                       <a:prstDash val="solid"/>
                     </a:lnB>
                     <a:solidFill>
-                      <a:srgbClr val="D6E5EA"/>
+                      <a:srgbClr val="D5EEF6"/>
                     </a:solidFill>
                   </a:tcPr>
                 </a:tc>
@@ -3711,7 +3889,7 @@
                       <a:r>
                         <a:rPr sz="1600" b="0">
                           <a:solidFill>
-                            <a:srgbClr val="2B2B2B"/>
+                            <a:srgbClr val="26231F"/>
                           </a:solidFill>
                         </a:rPr>
                         <a:t/>
@@ -3721,25 +3899,25 @@
                   <a:tcPr anchor="ctr" marL="73152" marR="73152">
                     <a:lnL w="9525" cap="flat" cmpd="sng" algn="ctr">
                       <a:solidFill>
-                        <a:srgbClr val="D6E5EA"/>
+                        <a:srgbClr val="D5EEF6"/>
                       </a:solidFill>
                       <a:prstDash val="solid"/>
                     </a:lnL>
                     <a:lnR w="9525" cap="flat" cmpd="sng" algn="ctr">
                       <a:solidFill>
-                        <a:srgbClr val="D6E5EA"/>
+                        <a:srgbClr val="D5EEF6"/>
                       </a:solidFill>
                       <a:prstDash val="solid"/>
                     </a:lnR>
                     <a:lnT w="9525" cap="flat" cmpd="sng" algn="ctr">
                       <a:solidFill>
-                        <a:srgbClr val="D6E5EA"/>
+                        <a:srgbClr val="D5EEF6"/>
                       </a:solidFill>
                       <a:prstDash val="solid"/>
                     </a:lnT>
                     <a:lnB w="9525" cap="flat" cmpd="sng" algn="ctr">
                       <a:solidFill>
-                        <a:srgbClr val="D6E5EA"/>
+                        <a:srgbClr val="D5EEF6"/>
                       </a:solidFill>
                       <a:prstDash val="solid"/>
                     </a:lnB>
@@ -3759,7 +3937,7 @@
                       <a:r>
                         <a:rPr sz="1600" b="1">
                           <a:solidFill>
-                            <a:srgbClr val="253A41"/>
+                            <a:srgbClr val="274149"/>
                           </a:solidFill>
                         </a:rPr>
                         <a:t>나이</a:t>
@@ -3769,30 +3947,30 @@
                   <a:tcPr anchor="ctr" marL="73152" marR="73152">
                     <a:lnL w="9525" cap="flat" cmpd="sng" algn="ctr">
                       <a:solidFill>
-                        <a:srgbClr val="D6E5EA"/>
+                        <a:srgbClr val="D5EEF6"/>
                       </a:solidFill>
                       <a:prstDash val="solid"/>
                     </a:lnL>
                     <a:lnR w="9525" cap="flat" cmpd="sng" algn="ctr">
                       <a:solidFill>
-                        <a:srgbClr val="D6E5EA"/>
+                        <a:srgbClr val="D5EEF6"/>
                       </a:solidFill>
                       <a:prstDash val="solid"/>
                     </a:lnR>
                     <a:lnT w="9525" cap="flat" cmpd="sng" algn="ctr">
                       <a:solidFill>
-                        <a:srgbClr val="D6E5EA"/>
+                        <a:srgbClr val="D5EEF6"/>
                       </a:solidFill>
                       <a:prstDash val="solid"/>
                     </a:lnT>
                     <a:lnB w="9525" cap="flat" cmpd="sng" algn="ctr">
                       <a:solidFill>
-                        <a:srgbClr val="D6E5EA"/>
+                        <a:srgbClr val="D5EEF6"/>
                       </a:solidFill>
                       <a:prstDash val="solid"/>
                     </a:lnB>
                     <a:solidFill>
-                      <a:srgbClr val="D6E5EA"/>
+                      <a:srgbClr val="D5EEF6"/>
                     </a:solidFill>
                   </a:tcPr>
                 </a:tc>
@@ -3805,7 +3983,7 @@
                       <a:r>
                         <a:rPr sz="1600" b="0">
                           <a:solidFill>
-                            <a:srgbClr val="2B2B2B"/>
+                            <a:srgbClr val="26231F"/>
                           </a:solidFill>
                         </a:rPr>
                         <a:t/>
@@ -3815,30 +3993,30 @@
                   <a:tcPr anchor="ctr" marL="73152" marR="73152">
                     <a:lnL w="9525" cap="flat" cmpd="sng" algn="ctr">
                       <a:solidFill>
-                        <a:srgbClr val="D6E5EA"/>
+                        <a:srgbClr val="D5EEF6"/>
                       </a:solidFill>
                       <a:prstDash val="solid"/>
                     </a:lnL>
                     <a:lnR w="9525" cap="flat" cmpd="sng" algn="ctr">
                       <a:solidFill>
-                        <a:srgbClr val="D6E5EA"/>
+                        <a:srgbClr val="D5EEF6"/>
                       </a:solidFill>
                       <a:prstDash val="solid"/>
                     </a:lnR>
                     <a:lnT w="9525" cap="flat" cmpd="sng" algn="ctr">
                       <a:solidFill>
-                        <a:srgbClr val="D6E5EA"/>
+                        <a:srgbClr val="D5EEF6"/>
                       </a:solidFill>
                       <a:prstDash val="solid"/>
                     </a:lnT>
                     <a:lnB w="9525" cap="flat" cmpd="sng" algn="ctr">
                       <a:solidFill>
-                        <a:srgbClr val="D6E5EA"/>
+                        <a:srgbClr val="D5EEF6"/>
                       </a:solidFill>
                       <a:prstDash val="solid"/>
                     </a:lnB>
                     <a:solidFill>
-                      <a:srgbClr val="F2F6F8"/>
+                      <a:srgbClr val="ECF7FB"/>
                     </a:solidFill>
                   </a:tcPr>
                 </a:tc>
@@ -3853,7 +4031,7 @@
                       <a:r>
                         <a:rPr sz="1600" b="1">
                           <a:solidFill>
-                            <a:srgbClr val="253A41"/>
+                            <a:srgbClr val="274149"/>
                           </a:solidFill>
                         </a:rPr>
                         <a:t>직업</a:t>
@@ -3863,30 +4041,30 @@
                   <a:tcPr anchor="ctr" marL="73152" marR="73152">
                     <a:lnL w="9525" cap="flat" cmpd="sng" algn="ctr">
                       <a:solidFill>
-                        <a:srgbClr val="D6E5EA"/>
+                        <a:srgbClr val="D5EEF6"/>
                       </a:solidFill>
                       <a:prstDash val="solid"/>
                     </a:lnL>
                     <a:lnR w="9525" cap="flat" cmpd="sng" algn="ctr">
                       <a:solidFill>
-                        <a:srgbClr val="D6E5EA"/>
+                        <a:srgbClr val="D5EEF6"/>
                       </a:solidFill>
                       <a:prstDash val="solid"/>
                     </a:lnR>
                     <a:lnT w="9525" cap="flat" cmpd="sng" algn="ctr">
                       <a:solidFill>
-                        <a:srgbClr val="D6E5EA"/>
+                        <a:srgbClr val="D5EEF6"/>
                       </a:solidFill>
                       <a:prstDash val="solid"/>
                     </a:lnT>
                     <a:lnB w="9525" cap="flat" cmpd="sng" algn="ctr">
                       <a:solidFill>
-                        <a:srgbClr val="D6E5EA"/>
+                        <a:srgbClr val="D5EEF6"/>
                       </a:solidFill>
                       <a:prstDash val="solid"/>
                     </a:lnB>
                     <a:solidFill>
-                      <a:srgbClr val="D6E5EA"/>
+                      <a:srgbClr val="D5EEF6"/>
                     </a:solidFill>
                   </a:tcPr>
                 </a:tc>
@@ -3899,7 +4077,7 @@
                       <a:r>
                         <a:rPr sz="1600" b="0">
                           <a:solidFill>
-                            <a:srgbClr val="2B2B2B"/>
+                            <a:srgbClr val="26231F"/>
                           </a:solidFill>
                         </a:rPr>
                         <a:t/>
@@ -3909,25 +4087,25 @@
                   <a:tcPr anchor="ctr" marL="73152" marR="73152">
                     <a:lnL w="9525" cap="flat" cmpd="sng" algn="ctr">
                       <a:solidFill>
-                        <a:srgbClr val="D6E5EA"/>
+                        <a:srgbClr val="D5EEF6"/>
                       </a:solidFill>
                       <a:prstDash val="solid"/>
                     </a:lnL>
                     <a:lnR w="9525" cap="flat" cmpd="sng" algn="ctr">
                       <a:solidFill>
-                        <a:srgbClr val="D6E5EA"/>
+                        <a:srgbClr val="D5EEF6"/>
                       </a:solidFill>
                       <a:prstDash val="solid"/>
                     </a:lnR>
                     <a:lnT w="9525" cap="flat" cmpd="sng" algn="ctr">
                       <a:solidFill>
-                        <a:srgbClr val="D6E5EA"/>
+                        <a:srgbClr val="D5EEF6"/>
                       </a:solidFill>
                       <a:prstDash val="solid"/>
                     </a:lnT>
                     <a:lnB w="9525" cap="flat" cmpd="sng" algn="ctr">
                       <a:solidFill>
-                        <a:srgbClr val="D6E5EA"/>
+                        <a:srgbClr val="D5EEF6"/>
                       </a:solidFill>
                       <a:prstDash val="solid"/>
                     </a:lnB>
@@ -3947,7 +4125,7 @@
                       <a:r>
                         <a:rPr sz="1600" b="1">
                           <a:solidFill>
-                            <a:srgbClr val="253A41"/>
+                            <a:srgbClr val="274149"/>
                           </a:solidFill>
                         </a:rPr>
                         <a:t>가족 구성</a:t>
@@ -3957,30 +4135,30 @@
                   <a:tcPr anchor="ctr" marL="73152" marR="73152">
                     <a:lnL w="9525" cap="flat" cmpd="sng" algn="ctr">
                       <a:solidFill>
-                        <a:srgbClr val="D6E5EA"/>
+                        <a:srgbClr val="D5EEF6"/>
                       </a:solidFill>
                       <a:prstDash val="solid"/>
                     </a:lnL>
                     <a:lnR w="9525" cap="flat" cmpd="sng" algn="ctr">
                       <a:solidFill>
-                        <a:srgbClr val="D6E5EA"/>
+                        <a:srgbClr val="D5EEF6"/>
                       </a:solidFill>
                       <a:prstDash val="solid"/>
                     </a:lnR>
                     <a:lnT w="9525" cap="flat" cmpd="sng" algn="ctr">
                       <a:solidFill>
-                        <a:srgbClr val="D6E5EA"/>
+                        <a:srgbClr val="D5EEF6"/>
                       </a:solidFill>
                       <a:prstDash val="solid"/>
                     </a:lnT>
                     <a:lnB w="9525" cap="flat" cmpd="sng" algn="ctr">
                       <a:solidFill>
-                        <a:srgbClr val="D6E5EA"/>
+                        <a:srgbClr val="D5EEF6"/>
                       </a:solidFill>
                       <a:prstDash val="solid"/>
                     </a:lnB>
                     <a:solidFill>
-                      <a:srgbClr val="D6E5EA"/>
+                      <a:srgbClr val="D5EEF6"/>
                     </a:solidFill>
                   </a:tcPr>
                 </a:tc>
@@ -3993,7 +4171,7 @@
                       <a:r>
                         <a:rPr sz="1600" b="0">
                           <a:solidFill>
-                            <a:srgbClr val="2B2B2B"/>
+                            <a:srgbClr val="26231F"/>
                           </a:solidFill>
                         </a:rPr>
                         <a:t/>
@@ -4003,30 +4181,30 @@
                   <a:tcPr anchor="ctr" marL="73152" marR="73152">
                     <a:lnL w="9525" cap="flat" cmpd="sng" algn="ctr">
                       <a:solidFill>
-                        <a:srgbClr val="D6E5EA"/>
+                        <a:srgbClr val="D5EEF6"/>
                       </a:solidFill>
                       <a:prstDash val="solid"/>
                     </a:lnL>
                     <a:lnR w="9525" cap="flat" cmpd="sng" algn="ctr">
                       <a:solidFill>
-                        <a:srgbClr val="D6E5EA"/>
+                        <a:srgbClr val="D5EEF6"/>
                       </a:solidFill>
                       <a:prstDash val="solid"/>
                     </a:lnR>
                     <a:lnT w="9525" cap="flat" cmpd="sng" algn="ctr">
                       <a:solidFill>
-                        <a:srgbClr val="D6E5EA"/>
+                        <a:srgbClr val="D5EEF6"/>
                       </a:solidFill>
                       <a:prstDash val="solid"/>
                     </a:lnT>
                     <a:lnB w="9525" cap="flat" cmpd="sng" algn="ctr">
                       <a:solidFill>
-                        <a:srgbClr val="D6E5EA"/>
+                        <a:srgbClr val="D5EEF6"/>
                       </a:solidFill>
                       <a:prstDash val="solid"/>
                     </a:lnB>
                     <a:solidFill>
-                      <a:srgbClr val="F2F6F8"/>
+                      <a:srgbClr val="ECF7FB"/>
                     </a:solidFill>
                   </a:tcPr>
                 </a:tc>
@@ -4069,14 +4247,112 @@
         </p:nvSpPr>
         <p:spPr>
           <a:xfrm>
-            <a:off x="0" y="384048"/>
-            <a:ext cx="9509522" cy="896112"/>
-          </a:xfrm>
-          <a:prstGeom prst="homePlate">
+            <a:off x="0" y="6565392"/>
+            <a:ext cx="12191695" cy="292608"/>
+          </a:xfrm>
+          <a:prstGeom prst="rect">
             <a:avLst/>
           </a:prstGeom>
           <a:solidFill>
-            <a:srgbClr val="497483"/>
+            <a:srgbClr val="ADDBEB"/>
+          </a:solidFill>
+          <a:ln>
+            <a:noFill/>
+          </a:ln>
+        </p:spPr>
+        <p:txBody>
+          <a:bodyPr rtlCol="0" anchor="ctr"/>
+          <a:lstStyle/>
+          <a:p>
+            <a:pPr algn="ctr"/>
+          </a:p>
+        </p:txBody>
+      </p:sp>
+      <p:sp>
+        <p:nvSpPr>
+          <p:cNvPr id="4" name="장식"/>
+          <p:cNvSpPr/>
+          <p:nvPr/>
+        </p:nvSpPr>
+        <p:spPr>
+          <a:xfrm>
+            <a:off x="640080" y="566928"/>
+            <a:ext cx="64008" cy="868680"/>
+          </a:xfrm>
+          <a:prstGeom prst="roundRect">
+            <a:avLst>
+              <a:gd name="adj" fmla="val 50000"/>
+            </a:avLst>
+          </a:prstGeom>
+          <a:solidFill>
+            <a:srgbClr val="98CFE1"/>
+          </a:solidFill>
+          <a:ln>
+            <a:noFill/>
+          </a:ln>
+        </p:spPr>
+        <p:txBody>
+          <a:bodyPr rtlCol="0" anchor="ctr"/>
+          <a:lstStyle/>
+          <a:p>
+            <a:pPr algn="ctr"/>
+          </a:p>
+        </p:txBody>
+      </p:sp>
+      <p:sp>
+        <p:nvSpPr>
+          <p:cNvPr id="5" name="상단 라벨"/>
+          <p:cNvSpPr txBox="1"/>
+          <p:nvPr/>
+        </p:nvSpPr>
+        <p:spPr>
+          <a:xfrm>
+            <a:off x="868680" y="274320"/>
+            <a:ext cx="5486400" cy="274320"/>
+          </a:xfrm>
+          <a:prstGeom prst="rect">
+            <a:avLst/>
+          </a:prstGeom>
+          <a:noFill/>
+        </p:spPr>
+        <p:txBody>
+          <a:bodyPr wrap="square" lIns="54864" rIns="54864" tIns="27432" bIns="27432" anchor="ctr">
+            <a:noAutofit/>
+          </a:bodyPr>
+          <a:lstStyle/>
+          <a:p>
+            <a:pPr algn="l">
+              <a:lnSpc>
+                <a:spcPct val="115000"/>
+              </a:lnSpc>
+            </a:pPr>
+            <a:r>
+              <a:rPr sz="900" b="1" i="0" spc="250">
+                <a:solidFill>
+                  <a:srgbClr val="8E8780"/>
+                </a:solidFill>
+              </a:rPr>
+              <a:t>INSURANCE CHECK</a:t>
+            </a:r>
+          </a:p>
+        </p:txBody>
+      </p:sp>
+      <p:sp>
+        <p:nvSpPr>
+          <p:cNvPr id="6" name="포인트"/>
+          <p:cNvSpPr/>
+          <p:nvPr/>
+        </p:nvSpPr>
+        <p:spPr>
+          <a:xfrm rot="18900000">
+            <a:off x="11167567" y="667512"/>
+            <a:ext cx="310896" cy="310896"/>
+          </a:xfrm>
+          <a:prstGeom prst="teardrop">
+            <a:avLst/>
+          </a:prstGeom>
+          <a:solidFill>
+            <a:srgbClr val="ADDBEB"/>
           </a:solidFill>
           <a:ln>
             <a:noFill/>
@@ -4102,8 +4378,8 @@
         </p:nvSpPr>
         <p:spPr>
           <a:xfrm>
-            <a:off x="640080" y="411480"/>
-            <a:ext cx="8412242" cy="822960"/>
+            <a:off x="868680" y="566928"/>
+            <a:ext cx="9448495" cy="868680"/>
           </a:xfrm>
         </p:spPr>
         <p:txBody>
@@ -4120,7 +4396,7 @@
             <a:r>
               <a:rPr sz="3000" b="1" i="0">
                 <a:solidFill>
-                  <a:srgbClr val="FFFFFF"/>
+                  <a:srgbClr val="26231F"/>
                 </a:solidFill>
               </a:rPr>
               <a:t>가입한 보험 목록</a:t>
@@ -4130,14 +4406,14 @@
       </p:sp>
       <p:graphicFrame>
         <p:nvGraphicFramePr>
-          <p:cNvPr id="4" name="표"/>
+          <p:cNvPr id="7" name="표"/>
           <p:cNvGraphicFramePr>
             <a:graphicFrameLocks noGrp="1"/>
           </p:cNvGraphicFramePr>
           <p:nvPr/>
         </p:nvGraphicFramePr>
         <p:xfrm>
-          <a:off x="640080" y="1645920"/>
+          <a:off x="640080" y="1783080"/>
           <a:ext cx="10911535" cy="4224528"/>
         </p:xfrm>
         <a:graphic>
@@ -4163,7 +4439,7 @@
                       <a:r>
                         <a:rPr sz="1400" b="1">
                           <a:solidFill>
-                            <a:srgbClr val="FFFFFF"/>
+                            <a:srgbClr val="26231F"/>
                           </a:solidFill>
                         </a:rPr>
                         <a:t>보험회사</a:t>
@@ -4173,30 +4449,30 @@
                   <a:tcPr anchor="ctr" marL="73152" marR="73152">
                     <a:lnL w="9525" cap="flat" cmpd="sng" algn="ctr">
                       <a:solidFill>
-                        <a:srgbClr val="497483"/>
+                        <a:srgbClr val="98CFE1"/>
                       </a:solidFill>
                       <a:prstDash val="solid"/>
                     </a:lnL>
                     <a:lnR w="9525" cap="flat" cmpd="sng" algn="ctr">
                       <a:solidFill>
-                        <a:srgbClr val="497483"/>
+                        <a:srgbClr val="98CFE1"/>
                       </a:solidFill>
                       <a:prstDash val="solid"/>
                     </a:lnR>
                     <a:lnT w="9525" cap="flat" cmpd="sng" algn="ctr">
                       <a:solidFill>
-                        <a:srgbClr val="497483"/>
+                        <a:srgbClr val="98CFE1"/>
                       </a:solidFill>
                       <a:prstDash val="solid"/>
                     </a:lnT>
                     <a:lnB w="9525" cap="flat" cmpd="sng" algn="ctr">
                       <a:solidFill>
-                        <a:srgbClr val="497483"/>
+                        <a:srgbClr val="98CFE1"/>
                       </a:solidFill>
                       <a:prstDash val="solid"/>
                     </a:lnB>
                     <a:solidFill>
-                      <a:srgbClr val="497483"/>
+                      <a:srgbClr val="98CFE1"/>
                     </a:solidFill>
                   </a:tcPr>
                 </a:tc>
@@ -4209,7 +4485,7 @@
                       <a:r>
                         <a:rPr sz="1400" b="1">
                           <a:solidFill>
-                            <a:srgbClr val="FFFFFF"/>
+                            <a:srgbClr val="26231F"/>
                           </a:solidFill>
                         </a:rPr>
                         <a:t>상품명</a:t>
@@ -4219,30 +4495,30 @@
                   <a:tcPr anchor="ctr" marL="73152" marR="73152">
                     <a:lnL w="9525" cap="flat" cmpd="sng" algn="ctr">
                       <a:solidFill>
-                        <a:srgbClr val="497483"/>
+                        <a:srgbClr val="98CFE1"/>
                       </a:solidFill>
                       <a:prstDash val="solid"/>
                     </a:lnL>
                     <a:lnR w="9525" cap="flat" cmpd="sng" algn="ctr">
                       <a:solidFill>
-                        <a:srgbClr val="497483"/>
+                        <a:srgbClr val="98CFE1"/>
                       </a:solidFill>
                       <a:prstDash val="solid"/>
                     </a:lnR>
                     <a:lnT w="9525" cap="flat" cmpd="sng" algn="ctr">
                       <a:solidFill>
-                        <a:srgbClr val="497483"/>
+                        <a:srgbClr val="98CFE1"/>
                       </a:solidFill>
                       <a:prstDash val="solid"/>
                     </a:lnT>
                     <a:lnB w="9525" cap="flat" cmpd="sng" algn="ctr">
                       <a:solidFill>
-                        <a:srgbClr val="497483"/>
+                        <a:srgbClr val="98CFE1"/>
                       </a:solidFill>
                       <a:prstDash val="solid"/>
                     </a:lnB>
                     <a:solidFill>
-                      <a:srgbClr val="497483"/>
+                      <a:srgbClr val="98CFE1"/>
                     </a:solidFill>
                   </a:tcPr>
                 </a:tc>
@@ -4255,7 +4531,7 @@
                       <a:r>
                         <a:rPr sz="1400" b="1">
                           <a:solidFill>
-                            <a:srgbClr val="FFFFFF"/>
+                            <a:srgbClr val="26231F"/>
                           </a:solidFill>
                         </a:rPr>
                         <a:t>종류</a:t>
@@ -4265,30 +4541,30 @@
                   <a:tcPr anchor="ctr" marL="73152" marR="73152">
                     <a:lnL w="9525" cap="flat" cmpd="sng" algn="ctr">
                       <a:solidFill>
-                        <a:srgbClr val="497483"/>
+                        <a:srgbClr val="98CFE1"/>
                       </a:solidFill>
                       <a:prstDash val="solid"/>
                     </a:lnL>
                     <a:lnR w="9525" cap="flat" cmpd="sng" algn="ctr">
                       <a:solidFill>
-                        <a:srgbClr val="497483"/>
+                        <a:srgbClr val="98CFE1"/>
                       </a:solidFill>
                       <a:prstDash val="solid"/>
                     </a:lnR>
                     <a:lnT w="9525" cap="flat" cmpd="sng" algn="ctr">
                       <a:solidFill>
-                        <a:srgbClr val="497483"/>
+                        <a:srgbClr val="98CFE1"/>
                       </a:solidFill>
                       <a:prstDash val="solid"/>
                     </a:lnT>
                     <a:lnB w="9525" cap="flat" cmpd="sng" algn="ctr">
                       <a:solidFill>
-                        <a:srgbClr val="497483"/>
+                        <a:srgbClr val="98CFE1"/>
                       </a:solidFill>
                       <a:prstDash val="solid"/>
                     </a:lnB>
                     <a:solidFill>
-                      <a:srgbClr val="497483"/>
+                      <a:srgbClr val="98CFE1"/>
                     </a:solidFill>
                   </a:tcPr>
                 </a:tc>
@@ -4301,7 +4577,7 @@
                       <a:r>
                         <a:rPr sz="1400" b="1">
                           <a:solidFill>
-                            <a:srgbClr val="FFFFFF"/>
+                            <a:srgbClr val="26231F"/>
                           </a:solidFill>
                         </a:rPr>
                         <a:t>만기일</a:t>
@@ -4311,30 +4587,30 @@
                   <a:tcPr anchor="ctr" marL="73152" marR="73152">
                     <a:lnL w="9525" cap="flat" cmpd="sng" algn="ctr">
                       <a:solidFill>
-                        <a:srgbClr val="497483"/>
+                        <a:srgbClr val="98CFE1"/>
                       </a:solidFill>
                       <a:prstDash val="solid"/>
                     </a:lnL>
                     <a:lnR w="9525" cap="flat" cmpd="sng" algn="ctr">
                       <a:solidFill>
-                        <a:srgbClr val="497483"/>
+                        <a:srgbClr val="98CFE1"/>
                       </a:solidFill>
                       <a:prstDash val="solid"/>
                     </a:lnR>
                     <a:lnT w="9525" cap="flat" cmpd="sng" algn="ctr">
                       <a:solidFill>
-                        <a:srgbClr val="497483"/>
+                        <a:srgbClr val="98CFE1"/>
                       </a:solidFill>
                       <a:prstDash val="solid"/>
                     </a:lnT>
                     <a:lnB w="9525" cap="flat" cmpd="sng" algn="ctr">
                       <a:solidFill>
-                        <a:srgbClr val="497483"/>
+                        <a:srgbClr val="98CFE1"/>
                       </a:solidFill>
                       <a:prstDash val="solid"/>
                     </a:lnB>
                     <a:solidFill>
-                      <a:srgbClr val="497483"/>
+                      <a:srgbClr val="98CFE1"/>
                     </a:solidFill>
                   </a:tcPr>
                 </a:tc>
@@ -4347,7 +4623,7 @@
                       <a:r>
                         <a:rPr sz="1400" b="1">
                           <a:solidFill>
-                            <a:srgbClr val="FFFFFF"/>
+                            <a:srgbClr val="26231F"/>
                           </a:solidFill>
                         </a:rPr>
                         <a:t>월 보험료</a:t>
@@ -4357,30 +4633,30 @@
                   <a:tcPr anchor="ctr" marL="73152" marR="73152">
                     <a:lnL w="9525" cap="flat" cmpd="sng" algn="ctr">
                       <a:solidFill>
-                        <a:srgbClr val="497483"/>
+                        <a:srgbClr val="98CFE1"/>
                       </a:solidFill>
                       <a:prstDash val="solid"/>
                     </a:lnL>
                     <a:lnR w="9525" cap="flat" cmpd="sng" algn="ctr">
                       <a:solidFill>
-                        <a:srgbClr val="497483"/>
+                        <a:srgbClr val="98CFE1"/>
                       </a:solidFill>
                       <a:prstDash val="solid"/>
                     </a:lnR>
                     <a:lnT w="9525" cap="flat" cmpd="sng" algn="ctr">
                       <a:solidFill>
-                        <a:srgbClr val="497483"/>
+                        <a:srgbClr val="98CFE1"/>
                       </a:solidFill>
                       <a:prstDash val="solid"/>
                     </a:lnT>
                     <a:lnB w="9525" cap="flat" cmpd="sng" algn="ctr">
                       <a:solidFill>
-                        <a:srgbClr val="497483"/>
+                        <a:srgbClr val="98CFE1"/>
                       </a:solidFill>
                       <a:prstDash val="solid"/>
                     </a:lnB>
                     <a:solidFill>
-                      <a:srgbClr val="497483"/>
+                      <a:srgbClr val="98CFE1"/>
                     </a:solidFill>
                   </a:tcPr>
                 </a:tc>
@@ -4395,7 +4671,7 @@
                       <a:r>
                         <a:rPr sz="1400" b="0">
                           <a:solidFill>
-                            <a:srgbClr val="2B2B2B"/>
+                            <a:srgbClr val="26231F"/>
                           </a:solidFill>
                         </a:rPr>
                         <a:t/>
@@ -4405,25 +4681,25 @@
                   <a:tcPr anchor="ctr" marL="73152" marR="73152">
                     <a:lnL w="9525" cap="flat" cmpd="sng" algn="ctr">
                       <a:solidFill>
-                        <a:srgbClr val="D6E5EA"/>
+                        <a:srgbClr val="D5EEF6"/>
                       </a:solidFill>
                       <a:prstDash val="solid"/>
                     </a:lnL>
                     <a:lnR w="9525" cap="flat" cmpd="sng" algn="ctr">
                       <a:solidFill>
-                        <a:srgbClr val="D6E5EA"/>
+                        <a:srgbClr val="D5EEF6"/>
                       </a:solidFill>
                       <a:prstDash val="solid"/>
                     </a:lnR>
                     <a:lnT w="9525" cap="flat" cmpd="sng" algn="ctr">
                       <a:solidFill>
-                        <a:srgbClr val="D6E5EA"/>
+                        <a:srgbClr val="D5EEF6"/>
                       </a:solidFill>
                       <a:prstDash val="solid"/>
                     </a:lnT>
                     <a:lnB w="9525" cap="flat" cmpd="sng" algn="ctr">
                       <a:solidFill>
-                        <a:srgbClr val="D6E5EA"/>
+                        <a:srgbClr val="D5EEF6"/>
                       </a:solidFill>
                       <a:prstDash val="solid"/>
                     </a:lnB>
@@ -4441,7 +4717,7 @@
                       <a:r>
                         <a:rPr sz="1400" b="0">
                           <a:solidFill>
-                            <a:srgbClr val="2B2B2B"/>
+                            <a:srgbClr val="26231F"/>
                           </a:solidFill>
                         </a:rPr>
                         <a:t/>
@@ -4451,25 +4727,25 @@
                   <a:tcPr anchor="ctr" marL="73152" marR="73152">
                     <a:lnL w="9525" cap="flat" cmpd="sng" algn="ctr">
                       <a:solidFill>
-                        <a:srgbClr val="D6E5EA"/>
+                        <a:srgbClr val="D5EEF6"/>
                       </a:solidFill>
                       <a:prstDash val="solid"/>
                     </a:lnL>
                     <a:lnR w="9525" cap="flat" cmpd="sng" algn="ctr">
                       <a:solidFill>
-                        <a:srgbClr val="D6E5EA"/>
+                        <a:srgbClr val="D5EEF6"/>
                       </a:solidFill>
                       <a:prstDash val="solid"/>
                     </a:lnR>
                     <a:lnT w="9525" cap="flat" cmpd="sng" algn="ctr">
                       <a:solidFill>
-                        <a:srgbClr val="D6E5EA"/>
+                        <a:srgbClr val="D5EEF6"/>
                       </a:solidFill>
                       <a:prstDash val="solid"/>
                     </a:lnT>
                     <a:lnB w="9525" cap="flat" cmpd="sng" algn="ctr">
                       <a:solidFill>
-                        <a:srgbClr val="D6E5EA"/>
+                        <a:srgbClr val="D5EEF6"/>
                       </a:solidFill>
                       <a:prstDash val="solid"/>
                     </a:lnB>
@@ -4487,7 +4763,7 @@
                       <a:r>
                         <a:rPr sz="1400" b="0">
                           <a:solidFill>
-                            <a:srgbClr val="2B2B2B"/>
+                            <a:srgbClr val="26231F"/>
                           </a:solidFill>
                         </a:rPr>
                         <a:t/>
@@ -4497,25 +4773,25 @@
                   <a:tcPr anchor="ctr" marL="73152" marR="73152">
                     <a:lnL w="9525" cap="flat" cmpd="sng" algn="ctr">
                       <a:solidFill>
-                        <a:srgbClr val="D6E5EA"/>
+                        <a:srgbClr val="D5EEF6"/>
                       </a:solidFill>
                       <a:prstDash val="solid"/>
                     </a:lnL>
                     <a:lnR w="9525" cap="flat" cmpd="sng" algn="ctr">
                       <a:solidFill>
-                        <a:srgbClr val="D6E5EA"/>
+                        <a:srgbClr val="D5EEF6"/>
                       </a:solidFill>
                       <a:prstDash val="solid"/>
                     </a:lnR>
                     <a:lnT w="9525" cap="flat" cmpd="sng" algn="ctr">
                       <a:solidFill>
-                        <a:srgbClr val="D6E5EA"/>
+                        <a:srgbClr val="D5EEF6"/>
                       </a:solidFill>
                       <a:prstDash val="solid"/>
                     </a:lnT>
                     <a:lnB w="9525" cap="flat" cmpd="sng" algn="ctr">
                       <a:solidFill>
-                        <a:srgbClr val="D6E5EA"/>
+                        <a:srgbClr val="D5EEF6"/>
                       </a:solidFill>
                       <a:prstDash val="solid"/>
                     </a:lnB>
@@ -4533,7 +4809,7 @@
                       <a:r>
                         <a:rPr sz="1400" b="0">
                           <a:solidFill>
-                            <a:srgbClr val="2B2B2B"/>
+                            <a:srgbClr val="26231F"/>
                           </a:solidFill>
                         </a:rPr>
                         <a:t/>
@@ -4543,25 +4819,25 @@
                   <a:tcPr anchor="ctr" marL="73152" marR="73152">
                     <a:lnL w="9525" cap="flat" cmpd="sng" algn="ctr">
                       <a:solidFill>
-                        <a:srgbClr val="D6E5EA"/>
+                        <a:srgbClr val="D5EEF6"/>
                       </a:solidFill>
                       <a:prstDash val="solid"/>
                     </a:lnL>
                     <a:lnR w="9525" cap="flat" cmpd="sng" algn="ctr">
                       <a:solidFill>
-                        <a:srgbClr val="D6E5EA"/>
+                        <a:srgbClr val="D5EEF6"/>
                       </a:solidFill>
                       <a:prstDash val="solid"/>
                     </a:lnR>
                     <a:lnT w="9525" cap="flat" cmpd="sng" algn="ctr">
                       <a:solidFill>
-                        <a:srgbClr val="D6E5EA"/>
+                        <a:srgbClr val="D5EEF6"/>
                       </a:solidFill>
                       <a:prstDash val="solid"/>
                     </a:lnT>
                     <a:lnB w="9525" cap="flat" cmpd="sng" algn="ctr">
                       <a:solidFill>
-                        <a:srgbClr val="D6E5EA"/>
+                        <a:srgbClr val="D5EEF6"/>
                       </a:solidFill>
                       <a:prstDash val="solid"/>
                     </a:lnB>
@@ -4579,7 +4855,7 @@
                       <a:r>
                         <a:rPr sz="1400" b="0">
                           <a:solidFill>
-                            <a:srgbClr val="2B2B2B"/>
+                            <a:srgbClr val="26231F"/>
                           </a:solidFill>
                         </a:rPr>
                         <a:t/>
@@ -4589,25 +4865,25 @@
                   <a:tcPr anchor="ctr" marL="73152" marR="73152">
                     <a:lnL w="9525" cap="flat" cmpd="sng" algn="ctr">
                       <a:solidFill>
-                        <a:srgbClr val="D6E5EA"/>
+                        <a:srgbClr val="D5EEF6"/>
                       </a:solidFill>
                       <a:prstDash val="solid"/>
                     </a:lnL>
                     <a:lnR w="9525" cap="flat" cmpd="sng" algn="ctr">
                       <a:solidFill>
-                        <a:srgbClr val="D6E5EA"/>
+                        <a:srgbClr val="D5EEF6"/>
                       </a:solidFill>
                       <a:prstDash val="solid"/>
                     </a:lnR>
                     <a:lnT w="9525" cap="flat" cmpd="sng" algn="ctr">
                       <a:solidFill>
-                        <a:srgbClr val="D6E5EA"/>
+                        <a:srgbClr val="D5EEF6"/>
                       </a:solidFill>
                       <a:prstDash val="solid"/>
                     </a:lnT>
                     <a:lnB w="9525" cap="flat" cmpd="sng" algn="ctr">
                       <a:solidFill>
-                        <a:srgbClr val="D6E5EA"/>
+                        <a:srgbClr val="D5EEF6"/>
                       </a:solidFill>
                       <a:prstDash val="solid"/>
                     </a:lnB>
@@ -4627,7 +4903,7 @@
                       <a:r>
                         <a:rPr sz="1400" b="0">
                           <a:solidFill>
-                            <a:srgbClr val="2B2B2B"/>
+                            <a:srgbClr val="26231F"/>
                           </a:solidFill>
                         </a:rPr>
                         <a:t/>
@@ -4637,30 +4913,30 @@
                   <a:tcPr anchor="ctr" marL="73152" marR="73152">
                     <a:lnL w="9525" cap="flat" cmpd="sng" algn="ctr">
                       <a:solidFill>
-                        <a:srgbClr val="D6E5EA"/>
+                        <a:srgbClr val="D5EEF6"/>
                       </a:solidFill>
                       <a:prstDash val="solid"/>
                     </a:lnL>
                     <a:lnR w="9525" cap="flat" cmpd="sng" algn="ctr">
                       <a:solidFill>
-                        <a:srgbClr val="D6E5EA"/>
+                        <a:srgbClr val="D5EEF6"/>
                       </a:solidFill>
                       <a:prstDash val="solid"/>
                     </a:lnR>
                     <a:lnT w="9525" cap="flat" cmpd="sng" algn="ctr">
                       <a:solidFill>
-                        <a:srgbClr val="D6E5EA"/>
+                        <a:srgbClr val="D5EEF6"/>
                       </a:solidFill>
                       <a:prstDash val="solid"/>
                     </a:lnT>
                     <a:lnB w="9525" cap="flat" cmpd="sng" algn="ctr">
                       <a:solidFill>
-                        <a:srgbClr val="D6E5EA"/>
+                        <a:srgbClr val="D5EEF6"/>
                       </a:solidFill>
                       <a:prstDash val="solid"/>
                     </a:lnB>
                     <a:solidFill>
-                      <a:srgbClr val="F2F6F8"/>
+                      <a:srgbClr val="ECF7FB"/>
                     </a:solidFill>
                   </a:tcPr>
                 </a:tc>
@@ -4673,7 +4949,7 @@
                       <a:r>
                         <a:rPr sz="1400" b="0">
                           <a:solidFill>
-                            <a:srgbClr val="2B2B2B"/>
+                            <a:srgbClr val="26231F"/>
                           </a:solidFill>
                         </a:rPr>
                         <a:t/>
@@ -4683,30 +4959,30 @@
                   <a:tcPr anchor="ctr" marL="73152" marR="73152">
                     <a:lnL w="9525" cap="flat" cmpd="sng" algn="ctr">
                       <a:solidFill>
-                        <a:srgbClr val="D6E5EA"/>
+                        <a:srgbClr val="D5EEF6"/>
                       </a:solidFill>
                       <a:prstDash val="solid"/>
                     </a:lnL>
                     <a:lnR w="9525" cap="flat" cmpd="sng" algn="ctr">
                       <a:solidFill>
-                        <a:srgbClr val="D6E5EA"/>
+                        <a:srgbClr val="D5EEF6"/>
                       </a:solidFill>
                       <a:prstDash val="solid"/>
                     </a:lnR>
                     <a:lnT w="9525" cap="flat" cmpd="sng" algn="ctr">
                       <a:solidFill>
-                        <a:srgbClr val="D6E5EA"/>
+                        <a:srgbClr val="D5EEF6"/>
                       </a:solidFill>
                       <a:prstDash val="solid"/>
                     </a:lnT>
                     <a:lnB w="9525" cap="flat" cmpd="sng" algn="ctr">
                       <a:solidFill>
-                        <a:srgbClr val="D6E5EA"/>
+                        <a:srgbClr val="D5EEF6"/>
                       </a:solidFill>
                       <a:prstDash val="solid"/>
                     </a:lnB>
                     <a:solidFill>
-                      <a:srgbClr val="F2F6F8"/>
+                      <a:srgbClr val="ECF7FB"/>
                     </a:solidFill>
                   </a:tcPr>
                 </a:tc>
@@ -4719,7 +4995,7 @@
                       <a:r>
                         <a:rPr sz="1400" b="0">
                           <a:solidFill>
-                            <a:srgbClr val="2B2B2B"/>
+                            <a:srgbClr val="26231F"/>
                           </a:solidFill>
                         </a:rPr>
                         <a:t/>
@@ -4729,30 +5005,30 @@
                   <a:tcPr anchor="ctr" marL="73152" marR="73152">
                     <a:lnL w="9525" cap="flat" cmpd="sng" algn="ctr">
                       <a:solidFill>
-                        <a:srgbClr val="D6E5EA"/>
+                        <a:srgbClr val="D5EEF6"/>
                       </a:solidFill>
                       <a:prstDash val="solid"/>
                     </a:lnL>
                     <a:lnR w="9525" cap="flat" cmpd="sng" algn="ctr">
                       <a:solidFill>
-                        <a:srgbClr val="D6E5EA"/>
+                        <a:srgbClr val="D5EEF6"/>
                       </a:solidFill>
                       <a:prstDash val="solid"/>
                     </a:lnR>
                     <a:lnT w="9525" cap="flat" cmpd="sng" algn="ctr">
                       <a:solidFill>
-                        <a:srgbClr val="D6E5EA"/>
+                        <a:srgbClr val="D5EEF6"/>
                       </a:solidFill>
                       <a:prstDash val="solid"/>
                     </a:lnT>
                     <a:lnB w="9525" cap="flat" cmpd="sng" algn="ctr">
                       <a:solidFill>
-                        <a:srgbClr val="D6E5EA"/>
+                        <a:srgbClr val="D5EEF6"/>
                       </a:solidFill>
                       <a:prstDash val="solid"/>
                     </a:lnB>
                     <a:solidFill>
-                      <a:srgbClr val="F2F6F8"/>
+                      <a:srgbClr val="ECF7FB"/>
                     </a:solidFill>
                   </a:tcPr>
                 </a:tc>
@@ -4765,7 +5041,7 @@
                       <a:r>
                         <a:rPr sz="1400" b="0">
                           <a:solidFill>
-                            <a:srgbClr val="2B2B2B"/>
+                            <a:srgbClr val="26231F"/>
                           </a:solidFill>
                         </a:rPr>
                         <a:t/>
@@ -4775,30 +5051,30 @@
                   <a:tcPr anchor="ctr" marL="73152" marR="73152">
                     <a:lnL w="9525" cap="flat" cmpd="sng" algn="ctr">
                       <a:solidFill>
-                        <a:srgbClr val="D6E5EA"/>
+                        <a:srgbClr val="D5EEF6"/>
                       </a:solidFill>
                       <a:prstDash val="solid"/>
                     </a:lnL>
                     <a:lnR w="9525" cap="flat" cmpd="sng" algn="ctr">
                       <a:solidFill>
-                        <a:srgbClr val="D6E5EA"/>
+                        <a:srgbClr val="D5EEF6"/>
                       </a:solidFill>
                       <a:prstDash val="solid"/>
                     </a:lnR>
                     <a:lnT w="9525" cap="flat" cmpd="sng" algn="ctr">
                       <a:solidFill>
-                        <a:srgbClr val="D6E5EA"/>
+                        <a:srgbClr val="D5EEF6"/>
                       </a:solidFill>
                       <a:prstDash val="solid"/>
                     </a:lnT>
                     <a:lnB w="9525" cap="flat" cmpd="sng" algn="ctr">
                       <a:solidFill>
-                        <a:srgbClr val="D6E5EA"/>
+                        <a:srgbClr val="D5EEF6"/>
                       </a:solidFill>
                       <a:prstDash val="solid"/>
                     </a:lnB>
                     <a:solidFill>
-                      <a:srgbClr val="F2F6F8"/>
+                      <a:srgbClr val="ECF7FB"/>
                     </a:solidFill>
                   </a:tcPr>
                 </a:tc>
@@ -4811,7 +5087,7 @@
                       <a:r>
                         <a:rPr sz="1400" b="0">
                           <a:solidFill>
-                            <a:srgbClr val="2B2B2B"/>
+                            <a:srgbClr val="26231F"/>
                           </a:solidFill>
                         </a:rPr>
                         <a:t/>
@@ -4821,30 +5097,30 @@
                   <a:tcPr anchor="ctr" marL="73152" marR="73152">
                     <a:lnL w="9525" cap="flat" cmpd="sng" algn="ctr">
                       <a:solidFill>
-                        <a:srgbClr val="D6E5EA"/>
+                        <a:srgbClr val="D5EEF6"/>
                       </a:solidFill>
                       <a:prstDash val="solid"/>
                     </a:lnL>
                     <a:lnR w="9525" cap="flat" cmpd="sng" algn="ctr">
                       <a:solidFill>
-                        <a:srgbClr val="D6E5EA"/>
+                        <a:srgbClr val="D5EEF6"/>
                       </a:solidFill>
                       <a:prstDash val="solid"/>
                     </a:lnR>
                     <a:lnT w="9525" cap="flat" cmpd="sng" algn="ctr">
                       <a:solidFill>
-                        <a:srgbClr val="D6E5EA"/>
+                        <a:srgbClr val="D5EEF6"/>
                       </a:solidFill>
                       <a:prstDash val="solid"/>
                     </a:lnT>
                     <a:lnB w="9525" cap="flat" cmpd="sng" algn="ctr">
                       <a:solidFill>
-                        <a:srgbClr val="D6E5EA"/>
+                        <a:srgbClr val="D5EEF6"/>
                       </a:solidFill>
                       <a:prstDash val="solid"/>
                     </a:lnB>
                     <a:solidFill>
-                      <a:srgbClr val="F2F6F8"/>
+                      <a:srgbClr val="ECF7FB"/>
                     </a:solidFill>
                   </a:tcPr>
                 </a:tc>
@@ -4859,7 +5135,7 @@
                       <a:r>
                         <a:rPr sz="1400" b="0">
                           <a:solidFill>
-                            <a:srgbClr val="2B2B2B"/>
+                            <a:srgbClr val="26231F"/>
                           </a:solidFill>
                         </a:rPr>
                         <a:t/>
@@ -4869,25 +5145,25 @@
                   <a:tcPr anchor="ctr" marL="73152" marR="73152">
                     <a:lnL w="9525" cap="flat" cmpd="sng" algn="ctr">
                       <a:solidFill>
-                        <a:srgbClr val="D6E5EA"/>
+                        <a:srgbClr val="D5EEF6"/>
                       </a:solidFill>
                       <a:prstDash val="solid"/>
                     </a:lnL>
                     <a:lnR w="9525" cap="flat" cmpd="sng" algn="ctr">
                       <a:solidFill>
-                        <a:srgbClr val="D6E5EA"/>
+                        <a:srgbClr val="D5EEF6"/>
                       </a:solidFill>
                       <a:prstDash val="solid"/>
                     </a:lnR>
                     <a:lnT w="9525" cap="flat" cmpd="sng" algn="ctr">
                       <a:solidFill>
-                        <a:srgbClr val="D6E5EA"/>
+                        <a:srgbClr val="D5EEF6"/>
                       </a:solidFill>
                       <a:prstDash val="solid"/>
                     </a:lnT>
                     <a:lnB w="9525" cap="flat" cmpd="sng" algn="ctr">
                       <a:solidFill>
-                        <a:srgbClr val="D6E5EA"/>
+                        <a:srgbClr val="D5EEF6"/>
                       </a:solidFill>
                       <a:prstDash val="solid"/>
                     </a:lnB>
@@ -4905,7 +5181,7 @@
                       <a:r>
                         <a:rPr sz="1400" b="0">
                           <a:solidFill>
-                            <a:srgbClr val="2B2B2B"/>
+                            <a:srgbClr val="26231F"/>
                           </a:solidFill>
                         </a:rPr>
                         <a:t/>
@@ -4915,25 +5191,25 @@
                   <a:tcPr anchor="ctr" marL="73152" marR="73152">
                     <a:lnL w="9525" cap="flat" cmpd="sng" algn="ctr">
                       <a:solidFill>
-                        <a:srgbClr val="D6E5EA"/>
+                        <a:srgbClr val="D5EEF6"/>
                       </a:solidFill>
                       <a:prstDash val="solid"/>
                     </a:lnL>
                     <a:lnR w="9525" cap="flat" cmpd="sng" algn="ctr">
                       <a:solidFill>
-                        <a:srgbClr val="D6E5EA"/>
+                        <a:srgbClr val="D5EEF6"/>
                       </a:solidFill>
                       <a:prstDash val="solid"/>
                     </a:lnR>
                     <a:lnT w="9525" cap="flat" cmpd="sng" algn="ctr">
                       <a:solidFill>
-                        <a:srgbClr val="D6E5EA"/>
+                        <a:srgbClr val="D5EEF6"/>
                       </a:solidFill>
                       <a:prstDash val="solid"/>
                     </a:lnT>
                     <a:lnB w="9525" cap="flat" cmpd="sng" algn="ctr">
                       <a:solidFill>
-                        <a:srgbClr val="D6E5EA"/>
+                        <a:srgbClr val="D5EEF6"/>
                       </a:solidFill>
                       <a:prstDash val="solid"/>
                     </a:lnB>
@@ -4951,7 +5227,7 @@
                       <a:r>
                         <a:rPr sz="1400" b="0">
                           <a:solidFill>
-                            <a:srgbClr val="2B2B2B"/>
+                            <a:srgbClr val="26231F"/>
                           </a:solidFill>
                         </a:rPr>
                         <a:t/>
@@ -4961,25 +5237,25 @@
                   <a:tcPr anchor="ctr" marL="73152" marR="73152">
                     <a:lnL w="9525" cap="flat" cmpd="sng" algn="ctr">
                       <a:solidFill>
-                        <a:srgbClr val="D6E5EA"/>
+                        <a:srgbClr val="D5EEF6"/>
                       </a:solidFill>
                       <a:prstDash val="solid"/>
                     </a:lnL>
                     <a:lnR w="9525" cap="flat" cmpd="sng" algn="ctr">
                       <a:solidFill>
-                        <a:srgbClr val="D6E5EA"/>
+                        <a:srgbClr val="D5EEF6"/>
                       </a:solidFill>
                       <a:prstDash val="solid"/>
                     </a:lnR>
                     <a:lnT w="9525" cap="flat" cmpd="sng" algn="ctr">
                       <a:solidFill>
-                        <a:srgbClr val="D6E5EA"/>
+                        <a:srgbClr val="D5EEF6"/>
                       </a:solidFill>
                       <a:prstDash val="solid"/>
                     </a:lnT>
                     <a:lnB w="9525" cap="flat" cmpd="sng" algn="ctr">
                       <a:solidFill>
-                        <a:srgbClr val="D6E5EA"/>
+                        <a:srgbClr val="D5EEF6"/>
                       </a:solidFill>
                       <a:prstDash val="solid"/>
                     </a:lnB>
@@ -4997,7 +5273,7 @@
                       <a:r>
                         <a:rPr sz="1400" b="0">
                           <a:solidFill>
-                            <a:srgbClr val="2B2B2B"/>
+                            <a:srgbClr val="26231F"/>
                           </a:solidFill>
                         </a:rPr>
                         <a:t/>
@@ -5007,25 +5283,25 @@
                   <a:tcPr anchor="ctr" marL="73152" marR="73152">
                     <a:lnL w="9525" cap="flat" cmpd="sng" algn="ctr">
                       <a:solidFill>
-                        <a:srgbClr val="D6E5EA"/>
+                        <a:srgbClr val="D5EEF6"/>
                       </a:solidFill>
                       <a:prstDash val="solid"/>
                     </a:lnL>
                     <a:lnR w="9525" cap="flat" cmpd="sng" algn="ctr">
                       <a:solidFill>
-                        <a:srgbClr val="D6E5EA"/>
+                        <a:srgbClr val="D5EEF6"/>
                       </a:solidFill>
                       <a:prstDash val="solid"/>
                     </a:lnR>
                     <a:lnT w="9525" cap="flat" cmpd="sng" algn="ctr">
                       <a:solidFill>
-                        <a:srgbClr val="D6E5EA"/>
+                        <a:srgbClr val="D5EEF6"/>
                       </a:solidFill>
                       <a:prstDash val="solid"/>
                     </a:lnT>
                     <a:lnB w="9525" cap="flat" cmpd="sng" algn="ctr">
                       <a:solidFill>
-                        <a:srgbClr val="D6E5EA"/>
+                        <a:srgbClr val="D5EEF6"/>
                       </a:solidFill>
                       <a:prstDash val="solid"/>
                     </a:lnB>
@@ -5043,7 +5319,7 @@
                       <a:r>
                         <a:rPr sz="1400" b="0">
                           <a:solidFill>
-                            <a:srgbClr val="2B2B2B"/>
+                            <a:srgbClr val="26231F"/>
                           </a:solidFill>
                         </a:rPr>
                         <a:t/>
@@ -5053,25 +5329,25 @@
                   <a:tcPr anchor="ctr" marL="73152" marR="73152">
                     <a:lnL w="9525" cap="flat" cmpd="sng" algn="ctr">
                       <a:solidFill>
-                        <a:srgbClr val="D6E5EA"/>
+                        <a:srgbClr val="D5EEF6"/>
                       </a:solidFill>
                       <a:prstDash val="solid"/>
                     </a:lnL>
                     <a:lnR w="9525" cap="flat" cmpd="sng" algn="ctr">
                       <a:solidFill>
-                        <a:srgbClr val="D6E5EA"/>
+                        <a:srgbClr val="D5EEF6"/>
                       </a:solidFill>
                       <a:prstDash val="solid"/>
                     </a:lnR>
                     <a:lnT w="9525" cap="flat" cmpd="sng" algn="ctr">
                       <a:solidFill>
-                        <a:srgbClr val="D6E5EA"/>
+                        <a:srgbClr val="D5EEF6"/>
                       </a:solidFill>
                       <a:prstDash val="solid"/>
                     </a:lnT>
                     <a:lnB w="9525" cap="flat" cmpd="sng" algn="ctr">
                       <a:solidFill>
-                        <a:srgbClr val="D6E5EA"/>
+                        <a:srgbClr val="D5EEF6"/>
                       </a:solidFill>
                       <a:prstDash val="solid"/>
                     </a:lnB>
@@ -5091,7 +5367,7 @@
                       <a:r>
                         <a:rPr sz="1400" b="0">
                           <a:solidFill>
-                            <a:srgbClr val="2B2B2B"/>
+                            <a:srgbClr val="26231F"/>
                           </a:solidFill>
                         </a:rPr>
                         <a:t/>
@@ -5101,30 +5377,30 @@
                   <a:tcPr anchor="ctr" marL="73152" marR="73152">
                     <a:lnL w="9525" cap="flat" cmpd="sng" algn="ctr">
                       <a:solidFill>
-                        <a:srgbClr val="D6E5EA"/>
+                        <a:srgbClr val="D5EEF6"/>
                       </a:solidFill>
                       <a:prstDash val="solid"/>
                     </a:lnL>
                     <a:lnR w="9525" cap="flat" cmpd="sng" algn="ctr">
                       <a:solidFill>
-                        <a:srgbClr val="D6E5EA"/>
+                        <a:srgbClr val="D5EEF6"/>
                       </a:solidFill>
                       <a:prstDash val="solid"/>
                     </a:lnR>
                     <a:lnT w="9525" cap="flat" cmpd="sng" algn="ctr">
                       <a:solidFill>
-                        <a:srgbClr val="D6E5EA"/>
+                        <a:srgbClr val="D5EEF6"/>
                       </a:solidFill>
                       <a:prstDash val="solid"/>
                     </a:lnT>
                     <a:lnB w="9525" cap="flat" cmpd="sng" algn="ctr">
                       <a:solidFill>
-                        <a:srgbClr val="D6E5EA"/>
+                        <a:srgbClr val="D5EEF6"/>
                       </a:solidFill>
                       <a:prstDash val="solid"/>
                     </a:lnB>
                     <a:solidFill>
-                      <a:srgbClr val="F2F6F8"/>
+                      <a:srgbClr val="ECF7FB"/>
                     </a:solidFill>
                   </a:tcPr>
                 </a:tc>
@@ -5137,7 +5413,7 @@
                       <a:r>
                         <a:rPr sz="1400" b="0">
                           <a:solidFill>
-                            <a:srgbClr val="2B2B2B"/>
+                            <a:srgbClr val="26231F"/>
                           </a:solidFill>
                         </a:rPr>
                         <a:t/>
@@ -5147,30 +5423,30 @@
                   <a:tcPr anchor="ctr" marL="73152" marR="73152">
                     <a:lnL w="9525" cap="flat" cmpd="sng" algn="ctr">
                       <a:solidFill>
-                        <a:srgbClr val="D6E5EA"/>
+                        <a:srgbClr val="D5EEF6"/>
                       </a:solidFill>
                       <a:prstDash val="solid"/>
                     </a:lnL>
                     <a:lnR w="9525" cap="flat" cmpd="sng" algn="ctr">
                       <a:solidFill>
-                        <a:srgbClr val="D6E5EA"/>
+                        <a:srgbClr val="D5EEF6"/>
                       </a:solidFill>
                       <a:prstDash val="solid"/>
                     </a:lnR>
                     <a:lnT w="9525" cap="flat" cmpd="sng" algn="ctr">
                       <a:solidFill>
-                        <a:srgbClr val="D6E5EA"/>
+                        <a:srgbClr val="D5EEF6"/>
                       </a:solidFill>
                       <a:prstDash val="solid"/>
                     </a:lnT>
                     <a:lnB w="9525" cap="flat" cmpd="sng" algn="ctr">
                       <a:solidFill>
-                        <a:srgbClr val="D6E5EA"/>
+                        <a:srgbClr val="D5EEF6"/>
                       </a:solidFill>
                       <a:prstDash val="solid"/>
                     </a:lnB>
                     <a:solidFill>
-                      <a:srgbClr val="F2F6F8"/>
+                      <a:srgbClr val="ECF7FB"/>
                     </a:solidFill>
                   </a:tcPr>
                 </a:tc>
@@ -5183,7 +5459,7 @@
                       <a:r>
                         <a:rPr sz="1400" b="0">
                           <a:solidFill>
-                            <a:srgbClr val="2B2B2B"/>
+                            <a:srgbClr val="26231F"/>
                           </a:solidFill>
                         </a:rPr>
                         <a:t/>
@@ -5193,30 +5469,30 @@
                   <a:tcPr anchor="ctr" marL="73152" marR="73152">
                     <a:lnL w="9525" cap="flat" cmpd="sng" algn="ctr">
                       <a:solidFill>
-                        <a:srgbClr val="D6E5EA"/>
+                        <a:srgbClr val="D5EEF6"/>
                       </a:solidFill>
                       <a:prstDash val="solid"/>
                     </a:lnL>
                     <a:lnR w="9525" cap="flat" cmpd="sng" algn="ctr">
                       <a:solidFill>
-                        <a:srgbClr val="D6E5EA"/>
+                        <a:srgbClr val="D5EEF6"/>
                       </a:solidFill>
                       <a:prstDash val="solid"/>
                     </a:lnR>
                     <a:lnT w="9525" cap="flat" cmpd="sng" algn="ctr">
                       <a:solidFill>
-                        <a:srgbClr val="D6E5EA"/>
+                        <a:srgbClr val="D5EEF6"/>
                       </a:solidFill>
                       <a:prstDash val="solid"/>
                     </a:lnT>
                     <a:lnB w="9525" cap="flat" cmpd="sng" algn="ctr">
                       <a:solidFill>
-                        <a:srgbClr val="D6E5EA"/>
+                        <a:srgbClr val="D5EEF6"/>
                       </a:solidFill>
                       <a:prstDash val="solid"/>
                     </a:lnB>
                     <a:solidFill>
-                      <a:srgbClr val="F2F6F8"/>
+                      <a:srgbClr val="ECF7FB"/>
                     </a:solidFill>
                   </a:tcPr>
                 </a:tc>
@@ -5229,7 +5505,7 @@
                       <a:r>
                         <a:rPr sz="1400" b="0">
                           <a:solidFill>
-                            <a:srgbClr val="2B2B2B"/>
+                            <a:srgbClr val="26231F"/>
                           </a:solidFill>
                         </a:rPr>
                         <a:t/>
@@ -5239,30 +5515,30 @@
                   <a:tcPr anchor="ctr" marL="73152" marR="73152">
                     <a:lnL w="9525" cap="flat" cmpd="sng" algn="ctr">
                       <a:solidFill>
-                        <a:srgbClr val="D6E5EA"/>
+                        <a:srgbClr val="D5EEF6"/>
                       </a:solidFill>
                       <a:prstDash val="solid"/>
                     </a:lnL>
                     <a:lnR w="9525" cap="flat" cmpd="sng" algn="ctr">
                       <a:solidFill>
-                        <a:srgbClr val="D6E5EA"/>
+                        <a:srgbClr val="D5EEF6"/>
                       </a:solidFill>
                       <a:prstDash val="solid"/>
                     </a:lnR>
                     <a:lnT w="9525" cap="flat" cmpd="sng" algn="ctr">
                       <a:solidFill>
-                        <a:srgbClr val="D6E5EA"/>
+                        <a:srgbClr val="D5EEF6"/>
                       </a:solidFill>
                       <a:prstDash val="solid"/>
                     </a:lnT>
                     <a:lnB w="9525" cap="flat" cmpd="sng" algn="ctr">
                       <a:solidFill>
-                        <a:srgbClr val="D6E5EA"/>
+                        <a:srgbClr val="D5EEF6"/>
                       </a:solidFill>
                       <a:prstDash val="solid"/>
                     </a:lnB>
                     <a:solidFill>
-                      <a:srgbClr val="F2F6F8"/>
+                      <a:srgbClr val="ECF7FB"/>
                     </a:solidFill>
                   </a:tcPr>
                 </a:tc>
@@ -5275,7 +5551,7 @@
                       <a:r>
                         <a:rPr sz="1400" b="0">
                           <a:solidFill>
-                            <a:srgbClr val="2B2B2B"/>
+                            <a:srgbClr val="26231F"/>
                           </a:solidFill>
                         </a:rPr>
                         <a:t/>
@@ -5285,30 +5561,30 @@
                   <a:tcPr anchor="ctr" marL="73152" marR="73152">
                     <a:lnL w="9525" cap="flat" cmpd="sng" algn="ctr">
                       <a:solidFill>
-                        <a:srgbClr val="D6E5EA"/>
+                        <a:srgbClr val="D5EEF6"/>
                       </a:solidFill>
                       <a:prstDash val="solid"/>
                     </a:lnL>
                     <a:lnR w="9525" cap="flat" cmpd="sng" algn="ctr">
                       <a:solidFill>
-                        <a:srgbClr val="D6E5EA"/>
+                        <a:srgbClr val="D5EEF6"/>
                       </a:solidFill>
                       <a:prstDash val="solid"/>
                     </a:lnR>
                     <a:lnT w="9525" cap="flat" cmpd="sng" algn="ctr">
                       <a:solidFill>
-                        <a:srgbClr val="D6E5EA"/>
+                        <a:srgbClr val="D5EEF6"/>
                       </a:solidFill>
                       <a:prstDash val="solid"/>
                     </a:lnT>
                     <a:lnB w="9525" cap="flat" cmpd="sng" algn="ctr">
                       <a:solidFill>
-                        <a:srgbClr val="D6E5EA"/>
+                        <a:srgbClr val="D5EEF6"/>
                       </a:solidFill>
                       <a:prstDash val="solid"/>
                     </a:lnB>
                     <a:solidFill>
-                      <a:srgbClr val="F2F6F8"/>
+                      <a:srgbClr val="ECF7FB"/>
                     </a:solidFill>
                   </a:tcPr>
                 </a:tc>
@@ -5323,7 +5599,7 @@
                       <a:r>
                         <a:rPr sz="1400" b="0">
                           <a:solidFill>
-                            <a:srgbClr val="2B2B2B"/>
+                            <a:srgbClr val="26231F"/>
                           </a:solidFill>
                         </a:rPr>
                         <a:t/>
@@ -5333,25 +5609,25 @@
                   <a:tcPr anchor="ctr" marL="73152" marR="73152">
                     <a:lnL w="9525" cap="flat" cmpd="sng" algn="ctr">
                       <a:solidFill>
-                        <a:srgbClr val="D6E5EA"/>
+                        <a:srgbClr val="D5EEF6"/>
                       </a:solidFill>
                       <a:prstDash val="solid"/>
                     </a:lnL>
                     <a:lnR w="9525" cap="flat" cmpd="sng" algn="ctr">
                       <a:solidFill>
-                        <a:srgbClr val="D6E5EA"/>
+                        <a:srgbClr val="D5EEF6"/>
                       </a:solidFill>
                       <a:prstDash val="solid"/>
                     </a:lnR>
                     <a:lnT w="9525" cap="flat" cmpd="sng" algn="ctr">
                       <a:solidFill>
-                        <a:srgbClr val="D6E5EA"/>
+                        <a:srgbClr val="D5EEF6"/>
                       </a:solidFill>
                       <a:prstDash val="solid"/>
                     </a:lnT>
                     <a:lnB w="9525" cap="flat" cmpd="sng" algn="ctr">
                       <a:solidFill>
-                        <a:srgbClr val="D6E5EA"/>
+                        <a:srgbClr val="D5EEF6"/>
                       </a:solidFill>
                       <a:prstDash val="solid"/>
                     </a:lnB>
@@ -5369,7 +5645,7 @@
                       <a:r>
                         <a:rPr sz="1400" b="0">
                           <a:solidFill>
-                            <a:srgbClr val="2B2B2B"/>
+                            <a:srgbClr val="26231F"/>
                           </a:solidFill>
                         </a:rPr>
                         <a:t/>
@@ -5379,25 +5655,25 @@
                   <a:tcPr anchor="ctr" marL="73152" marR="73152">
                     <a:lnL w="9525" cap="flat" cmpd="sng" algn="ctr">
                       <a:solidFill>
-                        <a:srgbClr val="D6E5EA"/>
+                        <a:srgbClr val="D5EEF6"/>
                       </a:solidFill>
                       <a:prstDash val="solid"/>
                     </a:lnL>
                     <a:lnR w="9525" cap="flat" cmpd="sng" algn="ctr">
                       <a:solidFill>
-                        <a:srgbClr val="D6E5EA"/>
+                        <a:srgbClr val="D5EEF6"/>
                       </a:solidFill>
                       <a:prstDash val="solid"/>
                     </a:lnR>
                     <a:lnT w="9525" cap="flat" cmpd="sng" algn="ctr">
                       <a:solidFill>
-                        <a:srgbClr val="D6E5EA"/>
+                        <a:srgbClr val="D5EEF6"/>
                       </a:solidFill>
                       <a:prstDash val="solid"/>
                     </a:lnT>
                     <a:lnB w="9525" cap="flat" cmpd="sng" algn="ctr">
                       <a:solidFill>
-                        <a:srgbClr val="D6E5EA"/>
+                        <a:srgbClr val="D5EEF6"/>
                       </a:solidFill>
                       <a:prstDash val="solid"/>
                     </a:lnB>
@@ -5415,7 +5691,7 @@
                       <a:r>
                         <a:rPr sz="1400" b="0">
                           <a:solidFill>
-                            <a:srgbClr val="2B2B2B"/>
+                            <a:srgbClr val="26231F"/>
                           </a:solidFill>
                         </a:rPr>
                         <a:t/>
@@ -5425,25 +5701,25 @@
                   <a:tcPr anchor="ctr" marL="73152" marR="73152">
                     <a:lnL w="9525" cap="flat" cmpd="sng" algn="ctr">
                       <a:solidFill>
-                        <a:srgbClr val="D6E5EA"/>
+                        <a:srgbClr val="D5EEF6"/>
                       </a:solidFill>
                       <a:prstDash val="solid"/>
                     </a:lnL>
                     <a:lnR w="9525" cap="flat" cmpd="sng" algn="ctr">
                       <a:solidFill>
-                        <a:srgbClr val="D6E5EA"/>
+                        <a:srgbClr val="D5EEF6"/>
                       </a:solidFill>
                       <a:prstDash val="solid"/>
                     </a:lnR>
                     <a:lnT w="9525" cap="flat" cmpd="sng" algn="ctr">
                       <a:solidFill>
-                        <a:srgbClr val="D6E5EA"/>
+                        <a:srgbClr val="D5EEF6"/>
                       </a:solidFill>
                       <a:prstDash val="solid"/>
                     </a:lnT>
                     <a:lnB w="9525" cap="flat" cmpd="sng" algn="ctr">
                       <a:solidFill>
-                        <a:srgbClr val="D6E5EA"/>
+                        <a:srgbClr val="D5EEF6"/>
                       </a:solidFill>
                       <a:prstDash val="solid"/>
                     </a:lnB>
@@ -5461,7 +5737,7 @@
                       <a:r>
                         <a:rPr sz="1400" b="0">
                           <a:solidFill>
-                            <a:srgbClr val="2B2B2B"/>
+                            <a:srgbClr val="26231F"/>
                           </a:solidFill>
                         </a:rPr>
                         <a:t/>
@@ -5471,25 +5747,25 @@
                   <a:tcPr anchor="ctr" marL="73152" marR="73152">
                     <a:lnL w="9525" cap="flat" cmpd="sng" algn="ctr">
                       <a:solidFill>
-                        <a:srgbClr val="D6E5EA"/>
+                        <a:srgbClr val="D5EEF6"/>
                       </a:solidFill>
                       <a:prstDash val="solid"/>
                     </a:lnL>
                     <a:lnR w="9525" cap="flat" cmpd="sng" algn="ctr">
                       <a:solidFill>
-                        <a:srgbClr val="D6E5EA"/>
+                        <a:srgbClr val="D5EEF6"/>
                       </a:solidFill>
                       <a:prstDash val="solid"/>
                     </a:lnR>
                     <a:lnT w="9525" cap="flat" cmpd="sng" algn="ctr">
                       <a:solidFill>
-                        <a:srgbClr val="D6E5EA"/>
+                        <a:srgbClr val="D5EEF6"/>
                       </a:solidFill>
                       <a:prstDash val="solid"/>
                     </a:lnT>
                     <a:lnB w="9525" cap="flat" cmpd="sng" algn="ctr">
                       <a:solidFill>
-                        <a:srgbClr val="D6E5EA"/>
+                        <a:srgbClr val="D5EEF6"/>
                       </a:solidFill>
                       <a:prstDash val="solid"/>
                     </a:lnB>
@@ -5507,7 +5783,7 @@
                       <a:r>
                         <a:rPr sz="1400" b="0">
                           <a:solidFill>
-                            <a:srgbClr val="2B2B2B"/>
+                            <a:srgbClr val="26231F"/>
                           </a:solidFill>
                         </a:rPr>
                         <a:t/>
@@ -5517,25 +5793,25 @@
                   <a:tcPr anchor="ctr" marL="73152" marR="73152">
                     <a:lnL w="9525" cap="flat" cmpd="sng" algn="ctr">
                       <a:solidFill>
-                        <a:srgbClr val="D6E5EA"/>
+                        <a:srgbClr val="D5EEF6"/>
                       </a:solidFill>
                       <a:prstDash val="solid"/>
                     </a:lnL>
                     <a:lnR w="9525" cap="flat" cmpd="sng" algn="ctr">
                       <a:solidFill>
-                        <a:srgbClr val="D6E5EA"/>
+                        <a:srgbClr val="D5EEF6"/>
                       </a:solidFill>
                       <a:prstDash val="solid"/>
                     </a:lnR>
                     <a:lnT w="9525" cap="flat" cmpd="sng" algn="ctr">
                       <a:solidFill>
-                        <a:srgbClr val="D6E5EA"/>
+                        <a:srgbClr val="D5EEF6"/>
                       </a:solidFill>
                       <a:prstDash val="solid"/>
                     </a:lnT>
                     <a:lnB w="9525" cap="flat" cmpd="sng" algn="ctr">
                       <a:solidFill>
-                        <a:srgbClr val="D6E5EA"/>
+                        <a:srgbClr val="D5EEF6"/>
                       </a:solidFill>
                       <a:prstDash val="solid"/>
                     </a:lnB>
@@ -5555,7 +5831,7 @@
                       <a:r>
                         <a:rPr sz="1400" b="0">
                           <a:solidFill>
-                            <a:srgbClr val="2B2B2B"/>
+                            <a:srgbClr val="26231F"/>
                           </a:solidFill>
                         </a:rPr>
                         <a:t/>
@@ -5565,30 +5841,30 @@
                   <a:tcPr anchor="ctr" marL="73152" marR="73152">
                     <a:lnL w="9525" cap="flat" cmpd="sng" algn="ctr">
                       <a:solidFill>
-                        <a:srgbClr val="D6E5EA"/>
+                        <a:srgbClr val="D5EEF6"/>
                       </a:solidFill>
                       <a:prstDash val="solid"/>
                     </a:lnL>
                     <a:lnR w="9525" cap="flat" cmpd="sng" algn="ctr">
                       <a:solidFill>
-                        <a:srgbClr val="D6E5EA"/>
+                        <a:srgbClr val="D5EEF6"/>
                       </a:solidFill>
                       <a:prstDash val="solid"/>
                     </a:lnR>
                     <a:lnT w="9525" cap="flat" cmpd="sng" algn="ctr">
                       <a:solidFill>
-                        <a:srgbClr val="D6E5EA"/>
+                        <a:srgbClr val="D5EEF6"/>
                       </a:solidFill>
                       <a:prstDash val="solid"/>
                     </a:lnT>
                     <a:lnB w="9525" cap="flat" cmpd="sng" algn="ctr">
                       <a:solidFill>
-                        <a:srgbClr val="D6E5EA"/>
+                        <a:srgbClr val="D5EEF6"/>
                       </a:solidFill>
                       <a:prstDash val="solid"/>
                     </a:lnB>
                     <a:solidFill>
-                      <a:srgbClr val="F2F6F8"/>
+                      <a:srgbClr val="ECF7FB"/>
                     </a:solidFill>
                   </a:tcPr>
                 </a:tc>
@@ -5601,7 +5877,7 @@
                       <a:r>
                         <a:rPr sz="1400" b="0">
                           <a:solidFill>
-                            <a:srgbClr val="2B2B2B"/>
+                            <a:srgbClr val="26231F"/>
                           </a:solidFill>
                         </a:rPr>
                         <a:t/>
@@ -5611,30 +5887,30 @@
                   <a:tcPr anchor="ctr" marL="73152" marR="73152">
                     <a:lnL w="9525" cap="flat" cmpd="sng" algn="ctr">
                       <a:solidFill>
-                        <a:srgbClr val="D6E5EA"/>
+                        <a:srgbClr val="D5EEF6"/>
                       </a:solidFill>
                       <a:prstDash val="solid"/>
                     </a:lnL>
                     <a:lnR w="9525" cap="flat" cmpd="sng" algn="ctr">
                       <a:solidFill>
-                        <a:srgbClr val="D6E5EA"/>
+                        <a:srgbClr val="D5EEF6"/>
                       </a:solidFill>
                       <a:prstDash val="solid"/>
                     </a:lnR>
                     <a:lnT w="9525" cap="flat" cmpd="sng" algn="ctr">
                       <a:solidFill>
-                        <a:srgbClr val="D6E5EA"/>
+                        <a:srgbClr val="D5EEF6"/>
                       </a:solidFill>
                       <a:prstDash val="solid"/>
                     </a:lnT>
                     <a:lnB w="9525" cap="flat" cmpd="sng" algn="ctr">
                       <a:solidFill>
-                        <a:srgbClr val="D6E5EA"/>
+                        <a:srgbClr val="D5EEF6"/>
                       </a:solidFill>
                       <a:prstDash val="solid"/>
                     </a:lnB>
                     <a:solidFill>
-                      <a:srgbClr val="F2F6F8"/>
+                      <a:srgbClr val="ECF7FB"/>
                     </a:solidFill>
                   </a:tcPr>
                 </a:tc>
@@ -5647,7 +5923,7 @@
                       <a:r>
                         <a:rPr sz="1400" b="0">
                           <a:solidFill>
-                            <a:srgbClr val="2B2B2B"/>
+                            <a:srgbClr val="26231F"/>
                           </a:solidFill>
                         </a:rPr>
                         <a:t/>
@@ -5657,30 +5933,30 @@
                   <a:tcPr anchor="ctr" marL="73152" marR="73152">
                     <a:lnL w="9525" cap="flat" cmpd="sng" algn="ctr">
                       <a:solidFill>
-                        <a:srgbClr val="D6E5EA"/>
+                        <a:srgbClr val="D5EEF6"/>
                       </a:solidFill>
                       <a:prstDash val="solid"/>
                     </a:lnL>
                     <a:lnR w="9525" cap="flat" cmpd="sng" algn="ctr">
                       <a:solidFill>
-                        <a:srgbClr val="D6E5EA"/>
+                        <a:srgbClr val="D5EEF6"/>
                       </a:solidFill>
                       <a:prstDash val="solid"/>
                     </a:lnR>
                     <a:lnT w="9525" cap="flat" cmpd="sng" algn="ctr">
                       <a:solidFill>
-                        <a:srgbClr val="D6E5EA"/>
+                        <a:srgbClr val="D5EEF6"/>
                       </a:solidFill>
                       <a:prstDash val="solid"/>
                     </a:lnT>
                     <a:lnB w="9525" cap="flat" cmpd="sng" algn="ctr">
                       <a:solidFill>
-                        <a:srgbClr val="D6E5EA"/>
+                        <a:srgbClr val="D5EEF6"/>
                       </a:solidFill>
                       <a:prstDash val="solid"/>
                     </a:lnB>
                     <a:solidFill>
-                      <a:srgbClr val="F2F6F8"/>
+                      <a:srgbClr val="ECF7FB"/>
                     </a:solidFill>
                   </a:tcPr>
                 </a:tc>
@@ -5693,7 +5969,7 @@
                       <a:r>
                         <a:rPr sz="1400" b="0">
                           <a:solidFill>
-                            <a:srgbClr val="2B2B2B"/>
+                            <a:srgbClr val="26231F"/>
                           </a:solidFill>
                         </a:rPr>
                         <a:t/>
@@ -5703,30 +5979,30 @@
                   <a:tcPr anchor="ctr" marL="73152" marR="73152">
                     <a:lnL w="9525" cap="flat" cmpd="sng" algn="ctr">
                       <a:solidFill>
-                        <a:srgbClr val="D6E5EA"/>
+                        <a:srgbClr val="D5EEF6"/>
                       </a:solidFill>
                       <a:prstDash val="solid"/>
                     </a:lnL>
                     <a:lnR w="9525" cap="flat" cmpd="sng" algn="ctr">
                       <a:solidFill>
-                        <a:srgbClr val="D6E5EA"/>
+                        <a:srgbClr val="D5EEF6"/>
                       </a:solidFill>
                       <a:prstDash val="solid"/>
                     </a:lnR>
                     <a:lnT w="9525" cap="flat" cmpd="sng" algn="ctr">
                       <a:solidFill>
-                        <a:srgbClr val="D6E5EA"/>
+                        <a:srgbClr val="D5EEF6"/>
                       </a:solidFill>
                       <a:prstDash val="solid"/>
                     </a:lnT>
                     <a:lnB w="9525" cap="flat" cmpd="sng" algn="ctr">
                       <a:solidFill>
-                        <a:srgbClr val="D6E5EA"/>
+                        <a:srgbClr val="D5EEF6"/>
                       </a:solidFill>
                       <a:prstDash val="solid"/>
                     </a:lnB>
                     <a:solidFill>
-                      <a:srgbClr val="F2F6F8"/>
+                      <a:srgbClr val="ECF7FB"/>
                     </a:solidFill>
                   </a:tcPr>
                 </a:tc>
@@ -5739,7 +6015,7 @@
                       <a:r>
                         <a:rPr sz="1400" b="0">
                           <a:solidFill>
-                            <a:srgbClr val="2B2B2B"/>
+                            <a:srgbClr val="26231F"/>
                           </a:solidFill>
                         </a:rPr>
                         <a:t/>
@@ -5749,30 +6025,30 @@
                   <a:tcPr anchor="ctr" marL="73152" marR="73152">
                     <a:lnL w="9525" cap="flat" cmpd="sng" algn="ctr">
                       <a:solidFill>
-                        <a:srgbClr val="D6E5EA"/>
+                        <a:srgbClr val="D5EEF6"/>
                       </a:solidFill>
                       <a:prstDash val="solid"/>
                     </a:lnL>
                     <a:lnR w="9525" cap="flat" cmpd="sng" algn="ctr">
                       <a:solidFill>
-                        <a:srgbClr val="D6E5EA"/>
+                        <a:srgbClr val="D5EEF6"/>
                       </a:solidFill>
                       <a:prstDash val="solid"/>
                     </a:lnR>
                     <a:lnT w="9525" cap="flat" cmpd="sng" algn="ctr">
                       <a:solidFill>
-                        <a:srgbClr val="D6E5EA"/>
+                        <a:srgbClr val="D5EEF6"/>
                       </a:solidFill>
                       <a:prstDash val="solid"/>
                     </a:lnT>
                     <a:lnB w="9525" cap="flat" cmpd="sng" algn="ctr">
                       <a:solidFill>
-                        <a:srgbClr val="D6E5EA"/>
+                        <a:srgbClr val="D5EEF6"/>
                       </a:solidFill>
                       <a:prstDash val="solid"/>
                     </a:lnB>
                     <a:solidFill>
-                      <a:srgbClr val="F2F6F8"/>
+                      <a:srgbClr val="ECF7FB"/>
                     </a:solidFill>
                   </a:tcPr>
                 </a:tc>
@@ -5815,14 +6091,112 @@
         </p:nvSpPr>
         <p:spPr>
           <a:xfrm>
-            <a:off x="0" y="384048"/>
-            <a:ext cx="9509522" cy="896112"/>
-          </a:xfrm>
-          <a:prstGeom prst="homePlate">
+            <a:off x="0" y="6565392"/>
+            <a:ext cx="12191695" cy="292608"/>
+          </a:xfrm>
+          <a:prstGeom prst="rect">
             <a:avLst/>
           </a:prstGeom>
           <a:solidFill>
-            <a:srgbClr val="497483"/>
+            <a:srgbClr val="ADDBEB"/>
+          </a:solidFill>
+          <a:ln>
+            <a:noFill/>
+          </a:ln>
+        </p:spPr>
+        <p:txBody>
+          <a:bodyPr rtlCol="0" anchor="ctr"/>
+          <a:lstStyle/>
+          <a:p>
+            <a:pPr algn="ctr"/>
+          </a:p>
+        </p:txBody>
+      </p:sp>
+      <p:sp>
+        <p:nvSpPr>
+          <p:cNvPr id="4" name="장식"/>
+          <p:cNvSpPr/>
+          <p:nvPr/>
+        </p:nvSpPr>
+        <p:spPr>
+          <a:xfrm>
+            <a:off x="640080" y="566928"/>
+            <a:ext cx="64008" cy="868680"/>
+          </a:xfrm>
+          <a:prstGeom prst="roundRect">
+            <a:avLst>
+              <a:gd name="adj" fmla="val 50000"/>
+            </a:avLst>
+          </a:prstGeom>
+          <a:solidFill>
+            <a:srgbClr val="98CFE1"/>
+          </a:solidFill>
+          <a:ln>
+            <a:noFill/>
+          </a:ln>
+        </p:spPr>
+        <p:txBody>
+          <a:bodyPr rtlCol="0" anchor="ctr"/>
+          <a:lstStyle/>
+          <a:p>
+            <a:pPr algn="ctr"/>
+          </a:p>
+        </p:txBody>
+      </p:sp>
+      <p:sp>
+        <p:nvSpPr>
+          <p:cNvPr id="5" name="상단 라벨"/>
+          <p:cNvSpPr txBox="1"/>
+          <p:nvPr/>
+        </p:nvSpPr>
+        <p:spPr>
+          <a:xfrm>
+            <a:off x="868680" y="274320"/>
+            <a:ext cx="5486400" cy="274320"/>
+          </a:xfrm>
+          <a:prstGeom prst="rect">
+            <a:avLst/>
+          </a:prstGeom>
+          <a:noFill/>
+        </p:spPr>
+        <p:txBody>
+          <a:bodyPr wrap="square" lIns="54864" rIns="54864" tIns="27432" bIns="27432" anchor="ctr">
+            <a:noAutofit/>
+          </a:bodyPr>
+          <a:lstStyle/>
+          <a:p>
+            <a:pPr algn="l">
+              <a:lnSpc>
+                <a:spcPct val="115000"/>
+              </a:lnSpc>
+            </a:pPr>
+            <a:r>
+              <a:rPr sz="900" b="1" i="0" spc="250">
+                <a:solidFill>
+                  <a:srgbClr val="8E8780"/>
+                </a:solidFill>
+              </a:rPr>
+              <a:t>INSURANCE CHECK</a:t>
+            </a:r>
+          </a:p>
+        </p:txBody>
+      </p:sp>
+      <p:sp>
+        <p:nvSpPr>
+          <p:cNvPr id="6" name="포인트"/>
+          <p:cNvSpPr/>
+          <p:nvPr/>
+        </p:nvSpPr>
+        <p:spPr>
+          <a:xfrm rot="18900000">
+            <a:off x="11167567" y="667512"/>
+            <a:ext cx="310896" cy="310896"/>
+          </a:xfrm>
+          <a:prstGeom prst="teardrop">
+            <a:avLst/>
+          </a:prstGeom>
+          <a:solidFill>
+            <a:srgbClr val="ADDBEB"/>
           </a:solidFill>
           <a:ln>
             <a:noFill/>
@@ -5848,8 +6222,8 @@
         </p:nvSpPr>
         <p:spPr>
           <a:xfrm>
-            <a:off x="640080" y="411480"/>
-            <a:ext cx="8412242" cy="822960"/>
+            <a:off x="868680" y="566928"/>
+            <a:ext cx="9448495" cy="868680"/>
           </a:xfrm>
         </p:spPr>
         <p:txBody>
@@ -5866,7 +6240,7 @@
             <a:r>
               <a:rPr sz="3000" b="1" i="0">
                 <a:solidFill>
-                  <a:srgbClr val="FFFFFF"/>
+                  <a:srgbClr val="26231F"/>
                 </a:solidFill>
               </a:rPr>
               <a:t>보장 항목 체크</a:t>
@@ -5876,14 +6250,14 @@
       </p:sp>
       <p:graphicFrame>
         <p:nvGraphicFramePr>
-          <p:cNvPr id="4" name="표"/>
+          <p:cNvPr id="7" name="표"/>
           <p:cNvGraphicFramePr>
             <a:graphicFrameLocks noGrp="1"/>
           </p:cNvGraphicFramePr>
           <p:nvPr/>
         </p:nvGraphicFramePr>
         <p:xfrm>
-          <a:off x="640080" y="1645920"/>
+          <a:off x="640080" y="1783080"/>
           <a:ext cx="10911534" cy="4773168"/>
         </p:xfrm>
         <a:graphic>
@@ -5908,7 +6282,7 @@
                       <a:r>
                         <a:rPr sz="1400" b="1">
                           <a:solidFill>
-                            <a:srgbClr val="FFFFFF"/>
+                            <a:srgbClr val="26231F"/>
                           </a:solidFill>
                         </a:rPr>
                         <a:t>보장 항목</a:t>
@@ -5918,30 +6292,30 @@
                   <a:tcPr anchor="ctr" marL="73152" marR="73152">
                     <a:lnL w="9525" cap="flat" cmpd="sng" algn="ctr">
                       <a:solidFill>
-                        <a:srgbClr val="497483"/>
+                        <a:srgbClr val="98CFE1"/>
                       </a:solidFill>
                       <a:prstDash val="solid"/>
                     </a:lnL>
                     <a:lnR w="9525" cap="flat" cmpd="sng" algn="ctr">
                       <a:solidFill>
-                        <a:srgbClr val="497483"/>
+                        <a:srgbClr val="98CFE1"/>
                       </a:solidFill>
                       <a:prstDash val="solid"/>
                     </a:lnR>
                     <a:lnT w="9525" cap="flat" cmpd="sng" algn="ctr">
                       <a:solidFill>
-                        <a:srgbClr val="497483"/>
+                        <a:srgbClr val="98CFE1"/>
                       </a:solidFill>
                       <a:prstDash val="solid"/>
                     </a:lnT>
                     <a:lnB w="9525" cap="flat" cmpd="sng" algn="ctr">
                       <a:solidFill>
-                        <a:srgbClr val="497483"/>
+                        <a:srgbClr val="98CFE1"/>
                       </a:solidFill>
                       <a:prstDash val="solid"/>
                     </a:lnB>
                     <a:solidFill>
-                      <a:srgbClr val="497483"/>
+                      <a:srgbClr val="98CFE1"/>
                     </a:solidFill>
                   </a:tcPr>
                 </a:tc>
@@ -5954,7 +6328,7 @@
                       <a:r>
                         <a:rPr sz="1400" b="1">
                           <a:solidFill>
-                            <a:srgbClr val="FFFFFF"/>
+                            <a:srgbClr val="26231F"/>
                           </a:solidFill>
                         </a:rPr>
                         <a:t>가입 확인</a:t>
@@ -5964,30 +6338,30 @@
                   <a:tcPr anchor="ctr" marL="73152" marR="73152">
                     <a:lnL w="9525" cap="flat" cmpd="sng" algn="ctr">
                       <a:solidFill>
-                        <a:srgbClr val="497483"/>
+                        <a:srgbClr val="98CFE1"/>
                       </a:solidFill>
                       <a:prstDash val="solid"/>
                     </a:lnL>
                     <a:lnR w="9525" cap="flat" cmpd="sng" algn="ctr">
                       <a:solidFill>
-                        <a:srgbClr val="497483"/>
+                        <a:srgbClr val="98CFE1"/>
                       </a:solidFill>
                       <a:prstDash val="solid"/>
                     </a:lnR>
                     <a:lnT w="9525" cap="flat" cmpd="sng" algn="ctr">
                       <a:solidFill>
-                        <a:srgbClr val="497483"/>
+                        <a:srgbClr val="98CFE1"/>
                       </a:solidFill>
                       <a:prstDash val="solid"/>
                     </a:lnT>
                     <a:lnB w="9525" cap="flat" cmpd="sng" algn="ctr">
                       <a:solidFill>
-                        <a:srgbClr val="497483"/>
+                        <a:srgbClr val="98CFE1"/>
                       </a:solidFill>
                       <a:prstDash val="solid"/>
                     </a:lnB>
                     <a:solidFill>
-                      <a:srgbClr val="497483"/>
+                      <a:srgbClr val="98CFE1"/>
                     </a:solidFill>
                   </a:tcPr>
                 </a:tc>
@@ -6000,7 +6374,7 @@
                       <a:r>
                         <a:rPr sz="1400" b="1">
                           <a:solidFill>
-                            <a:srgbClr val="FFFFFF"/>
+                            <a:srgbClr val="26231F"/>
                           </a:solidFill>
                         </a:rPr>
                         <a:t>확인 필요</a:t>
@@ -6010,30 +6384,30 @@
                   <a:tcPr anchor="ctr" marL="73152" marR="73152">
                     <a:lnL w="9525" cap="flat" cmpd="sng" algn="ctr">
                       <a:solidFill>
-                        <a:srgbClr val="497483"/>
+                        <a:srgbClr val="98CFE1"/>
                       </a:solidFill>
                       <a:prstDash val="solid"/>
                     </a:lnL>
                     <a:lnR w="9525" cap="flat" cmpd="sng" algn="ctr">
                       <a:solidFill>
-                        <a:srgbClr val="497483"/>
+                        <a:srgbClr val="98CFE1"/>
                       </a:solidFill>
                       <a:prstDash val="solid"/>
                     </a:lnR>
                     <a:lnT w="9525" cap="flat" cmpd="sng" algn="ctr">
                       <a:solidFill>
-                        <a:srgbClr val="497483"/>
+                        <a:srgbClr val="98CFE1"/>
                       </a:solidFill>
                       <a:prstDash val="solid"/>
                     </a:lnT>
                     <a:lnB w="9525" cap="flat" cmpd="sng" algn="ctr">
                       <a:solidFill>
-                        <a:srgbClr val="497483"/>
+                        <a:srgbClr val="98CFE1"/>
                       </a:solidFill>
                       <a:prstDash val="solid"/>
                     </a:lnB>
                     <a:solidFill>
-                      <a:srgbClr val="497483"/>
+                      <a:srgbClr val="98CFE1"/>
                     </a:solidFill>
                   </a:tcPr>
                 </a:tc>
@@ -6046,7 +6420,7 @@
                       <a:r>
                         <a:rPr sz="1400" b="1">
                           <a:solidFill>
-                            <a:srgbClr val="FFFFFF"/>
+                            <a:srgbClr val="26231F"/>
                           </a:solidFill>
                         </a:rPr>
                         <a:t>해당 없음</a:t>
@@ -6056,30 +6430,30 @@
                   <a:tcPr anchor="ctr" marL="73152" marR="73152">
                     <a:lnL w="9525" cap="flat" cmpd="sng" algn="ctr">
                       <a:solidFill>
-                        <a:srgbClr val="497483"/>
+                        <a:srgbClr val="98CFE1"/>
                       </a:solidFill>
                       <a:prstDash val="solid"/>
                     </a:lnL>
                     <a:lnR w="9525" cap="flat" cmpd="sng" algn="ctr">
                       <a:solidFill>
-                        <a:srgbClr val="497483"/>
+                        <a:srgbClr val="98CFE1"/>
                       </a:solidFill>
                       <a:prstDash val="solid"/>
                     </a:lnR>
                     <a:lnT w="9525" cap="flat" cmpd="sng" algn="ctr">
                       <a:solidFill>
-                        <a:srgbClr val="497483"/>
+                        <a:srgbClr val="98CFE1"/>
                       </a:solidFill>
                       <a:prstDash val="solid"/>
                     </a:lnT>
                     <a:lnB w="9525" cap="flat" cmpd="sng" algn="ctr">
                       <a:solidFill>
-                        <a:srgbClr val="497483"/>
+                        <a:srgbClr val="98CFE1"/>
                       </a:solidFill>
                       <a:prstDash val="solid"/>
                     </a:lnB>
                     <a:solidFill>
-                      <a:srgbClr val="497483"/>
+                      <a:srgbClr val="98CFE1"/>
                     </a:solidFill>
                   </a:tcPr>
                 </a:tc>
@@ -6094,7 +6468,7 @@
                       <a:r>
                         <a:rPr sz="1400" b="1">
                           <a:solidFill>
-                            <a:srgbClr val="253A41"/>
+                            <a:srgbClr val="274149"/>
                           </a:solidFill>
                         </a:rPr>
                         <a:t>사망·재해</a:t>
@@ -6104,30 +6478,30 @@
                   <a:tcPr anchor="ctr" marL="73152" marR="73152">
                     <a:lnL w="9525" cap="flat" cmpd="sng" algn="ctr">
                       <a:solidFill>
-                        <a:srgbClr val="D6E5EA"/>
+                        <a:srgbClr val="D5EEF6"/>
                       </a:solidFill>
                       <a:prstDash val="solid"/>
                     </a:lnL>
                     <a:lnR w="9525" cap="flat" cmpd="sng" algn="ctr">
                       <a:solidFill>
-                        <a:srgbClr val="D6E5EA"/>
+                        <a:srgbClr val="D5EEF6"/>
                       </a:solidFill>
                       <a:prstDash val="solid"/>
                     </a:lnR>
                     <a:lnT w="9525" cap="flat" cmpd="sng" algn="ctr">
                       <a:solidFill>
-                        <a:srgbClr val="D6E5EA"/>
+                        <a:srgbClr val="D5EEF6"/>
                       </a:solidFill>
                       <a:prstDash val="solid"/>
                     </a:lnT>
                     <a:lnB w="9525" cap="flat" cmpd="sng" algn="ctr">
                       <a:solidFill>
-                        <a:srgbClr val="D6E5EA"/>
+                        <a:srgbClr val="D5EEF6"/>
                       </a:solidFill>
                       <a:prstDash val="solid"/>
                     </a:lnB>
                     <a:solidFill>
-                      <a:srgbClr val="D6E5EA"/>
+                      <a:srgbClr val="D5EEF6"/>
                     </a:solidFill>
                   </a:tcPr>
                 </a:tc>
@@ -6140,7 +6514,7 @@
                       <a:r>
                         <a:rPr sz="1400" b="0">
                           <a:solidFill>
-                            <a:srgbClr val="2B2B2B"/>
+                            <a:srgbClr val="26231F"/>
                           </a:solidFill>
                         </a:rPr>
                         <a:t>□</a:t>
@@ -6150,25 +6524,25 @@
                   <a:tcPr anchor="ctr" marL="73152" marR="73152">
                     <a:lnL w="9525" cap="flat" cmpd="sng" algn="ctr">
                       <a:solidFill>
-                        <a:srgbClr val="D6E5EA"/>
+                        <a:srgbClr val="D5EEF6"/>
                       </a:solidFill>
                       <a:prstDash val="solid"/>
                     </a:lnL>
                     <a:lnR w="9525" cap="flat" cmpd="sng" algn="ctr">
                       <a:solidFill>
-                        <a:srgbClr val="D6E5EA"/>
+                        <a:srgbClr val="D5EEF6"/>
                       </a:solidFill>
                       <a:prstDash val="solid"/>
                     </a:lnR>
                     <a:lnT w="9525" cap="flat" cmpd="sng" algn="ctr">
                       <a:solidFill>
-                        <a:srgbClr val="D6E5EA"/>
+                        <a:srgbClr val="D5EEF6"/>
                       </a:solidFill>
                       <a:prstDash val="solid"/>
                     </a:lnT>
                     <a:lnB w="9525" cap="flat" cmpd="sng" algn="ctr">
                       <a:solidFill>
-                        <a:srgbClr val="D6E5EA"/>
+                        <a:srgbClr val="D5EEF6"/>
                       </a:solidFill>
                       <a:prstDash val="solid"/>
                     </a:lnB>
@@ -6186,7 +6560,7 @@
                       <a:r>
                         <a:rPr sz="1400" b="0">
                           <a:solidFill>
-                            <a:srgbClr val="2B2B2B"/>
+                            <a:srgbClr val="26231F"/>
                           </a:solidFill>
                         </a:rPr>
                         <a:t>□</a:t>
@@ -6196,25 +6570,25 @@
                   <a:tcPr anchor="ctr" marL="73152" marR="73152">
                     <a:lnL w="9525" cap="flat" cmpd="sng" algn="ctr">
                       <a:solidFill>
-                        <a:srgbClr val="D6E5EA"/>
+                        <a:srgbClr val="D5EEF6"/>
                       </a:solidFill>
                       <a:prstDash val="solid"/>
                     </a:lnL>
                     <a:lnR w="9525" cap="flat" cmpd="sng" algn="ctr">
                       <a:solidFill>
-                        <a:srgbClr val="D6E5EA"/>
+                        <a:srgbClr val="D5EEF6"/>
                       </a:solidFill>
                       <a:prstDash val="solid"/>
                     </a:lnR>
                     <a:lnT w="9525" cap="flat" cmpd="sng" algn="ctr">
                       <a:solidFill>
-                        <a:srgbClr val="D6E5EA"/>
+                        <a:srgbClr val="D5EEF6"/>
                       </a:solidFill>
                       <a:prstDash val="solid"/>
                     </a:lnT>
                     <a:lnB w="9525" cap="flat" cmpd="sng" algn="ctr">
                       <a:solidFill>
-                        <a:srgbClr val="D6E5EA"/>
+                        <a:srgbClr val="D5EEF6"/>
                       </a:solidFill>
                       <a:prstDash val="solid"/>
                     </a:lnB>
@@ -6232,7 +6606,7 @@
                       <a:r>
                         <a:rPr sz="1400" b="0">
                           <a:solidFill>
-                            <a:srgbClr val="2B2B2B"/>
+                            <a:srgbClr val="26231F"/>
                           </a:solidFill>
                         </a:rPr>
                         <a:t>□</a:t>
@@ -6242,25 +6616,25 @@
                   <a:tcPr anchor="ctr" marL="73152" marR="73152">
                     <a:lnL w="9525" cap="flat" cmpd="sng" algn="ctr">
                       <a:solidFill>
-                        <a:srgbClr val="D6E5EA"/>
+                        <a:srgbClr val="D5EEF6"/>
                       </a:solidFill>
                       <a:prstDash val="solid"/>
                     </a:lnL>
                     <a:lnR w="9525" cap="flat" cmpd="sng" algn="ctr">
                       <a:solidFill>
-                        <a:srgbClr val="D6E5EA"/>
+                        <a:srgbClr val="D5EEF6"/>
                       </a:solidFill>
                       <a:prstDash val="solid"/>
                     </a:lnR>
                     <a:lnT w="9525" cap="flat" cmpd="sng" algn="ctr">
                       <a:solidFill>
-                        <a:srgbClr val="D6E5EA"/>
+                        <a:srgbClr val="D5EEF6"/>
                       </a:solidFill>
                       <a:prstDash val="solid"/>
                     </a:lnT>
                     <a:lnB w="9525" cap="flat" cmpd="sng" algn="ctr">
                       <a:solidFill>
-                        <a:srgbClr val="D6E5EA"/>
+                        <a:srgbClr val="D5EEF6"/>
                       </a:solidFill>
                       <a:prstDash val="solid"/>
                     </a:lnB>
@@ -6280,7 +6654,7 @@
                       <a:r>
                         <a:rPr sz="1400" b="1">
                           <a:solidFill>
-                            <a:srgbClr val="253A41"/>
+                            <a:srgbClr val="274149"/>
                           </a:solidFill>
                         </a:rPr>
                         <a:t>질병 진단</a:t>
@@ -6290,30 +6664,30 @@
                   <a:tcPr anchor="ctr" marL="73152" marR="73152">
                     <a:lnL w="9525" cap="flat" cmpd="sng" algn="ctr">
                       <a:solidFill>
-                        <a:srgbClr val="D6E5EA"/>
+                        <a:srgbClr val="D5EEF6"/>
                       </a:solidFill>
                       <a:prstDash val="solid"/>
                     </a:lnL>
                     <a:lnR w="9525" cap="flat" cmpd="sng" algn="ctr">
                       <a:solidFill>
-                        <a:srgbClr val="D6E5EA"/>
+                        <a:srgbClr val="D5EEF6"/>
                       </a:solidFill>
                       <a:prstDash val="solid"/>
                     </a:lnR>
                     <a:lnT w="9525" cap="flat" cmpd="sng" algn="ctr">
                       <a:solidFill>
-                        <a:srgbClr val="D6E5EA"/>
+                        <a:srgbClr val="D5EEF6"/>
                       </a:solidFill>
                       <a:prstDash val="solid"/>
                     </a:lnT>
                     <a:lnB w="9525" cap="flat" cmpd="sng" algn="ctr">
                       <a:solidFill>
-                        <a:srgbClr val="D6E5EA"/>
+                        <a:srgbClr val="D5EEF6"/>
                       </a:solidFill>
                       <a:prstDash val="solid"/>
                     </a:lnB>
                     <a:solidFill>
-                      <a:srgbClr val="D6E5EA"/>
+                      <a:srgbClr val="D5EEF6"/>
                     </a:solidFill>
                   </a:tcPr>
                 </a:tc>
@@ -6326,7 +6700,7 @@
                       <a:r>
                         <a:rPr sz="1400" b="0">
                           <a:solidFill>
-                            <a:srgbClr val="2B2B2B"/>
+                            <a:srgbClr val="26231F"/>
                           </a:solidFill>
                         </a:rPr>
                         <a:t>□</a:t>
@@ -6336,30 +6710,30 @@
                   <a:tcPr anchor="ctr" marL="73152" marR="73152">
                     <a:lnL w="9525" cap="flat" cmpd="sng" algn="ctr">
                       <a:solidFill>
-                        <a:srgbClr val="D6E5EA"/>
+                        <a:srgbClr val="D5EEF6"/>
                       </a:solidFill>
                       <a:prstDash val="solid"/>
                     </a:lnL>
                     <a:lnR w="9525" cap="flat" cmpd="sng" algn="ctr">
                       <a:solidFill>
-                        <a:srgbClr val="D6E5EA"/>
+                        <a:srgbClr val="D5EEF6"/>
                       </a:solidFill>
                       <a:prstDash val="solid"/>
                     </a:lnR>
                     <a:lnT w="9525" cap="flat" cmpd="sng" algn="ctr">
                       <a:solidFill>
-                        <a:srgbClr val="D6E5EA"/>
+                        <a:srgbClr val="D5EEF6"/>
                       </a:solidFill>
                       <a:prstDash val="solid"/>
                     </a:lnT>
                     <a:lnB w="9525" cap="flat" cmpd="sng" algn="ctr">
                       <a:solidFill>
-                        <a:srgbClr val="D6E5EA"/>
+                        <a:srgbClr val="D5EEF6"/>
                       </a:solidFill>
                       <a:prstDash val="solid"/>
                     </a:lnB>
                     <a:solidFill>
-                      <a:srgbClr val="F2F6F8"/>
+                      <a:srgbClr val="ECF7FB"/>
                     </a:solidFill>
                   </a:tcPr>
                 </a:tc>
@@ -6372,7 +6746,7 @@
                       <a:r>
                         <a:rPr sz="1400" b="0">
                           <a:solidFill>
-                            <a:srgbClr val="2B2B2B"/>
+                            <a:srgbClr val="26231F"/>
                           </a:solidFill>
                         </a:rPr>
                         <a:t>□</a:t>
@@ -6382,30 +6756,30 @@
                   <a:tcPr anchor="ctr" marL="73152" marR="73152">
                     <a:lnL w="9525" cap="flat" cmpd="sng" algn="ctr">
                       <a:solidFill>
-                        <a:srgbClr val="D6E5EA"/>
+                        <a:srgbClr val="D5EEF6"/>
                       </a:solidFill>
                       <a:prstDash val="solid"/>
                     </a:lnL>
                     <a:lnR w="9525" cap="flat" cmpd="sng" algn="ctr">
                       <a:solidFill>
-                        <a:srgbClr val="D6E5EA"/>
+                        <a:srgbClr val="D5EEF6"/>
                       </a:solidFill>
                       <a:prstDash val="solid"/>
                     </a:lnR>
                     <a:lnT w="9525" cap="flat" cmpd="sng" algn="ctr">
                       <a:solidFill>
-                        <a:srgbClr val="D6E5EA"/>
+                        <a:srgbClr val="D5EEF6"/>
                       </a:solidFill>
                       <a:prstDash val="solid"/>
                     </a:lnT>
                     <a:lnB w="9525" cap="flat" cmpd="sng" algn="ctr">
                       <a:solidFill>
-                        <a:srgbClr val="D6E5EA"/>
+                        <a:srgbClr val="D5EEF6"/>
                       </a:solidFill>
                       <a:prstDash val="solid"/>
                     </a:lnB>
                     <a:solidFill>
-                      <a:srgbClr val="F2F6F8"/>
+                      <a:srgbClr val="ECF7FB"/>
                     </a:solidFill>
                   </a:tcPr>
                 </a:tc>
@@ -6418,7 +6792,7 @@
                       <a:r>
                         <a:rPr sz="1400" b="0">
                           <a:solidFill>
-                            <a:srgbClr val="2B2B2B"/>
+                            <a:srgbClr val="26231F"/>
                           </a:solidFill>
                         </a:rPr>
                         <a:t>□</a:t>
@@ -6428,30 +6802,30 @@
                   <a:tcPr anchor="ctr" marL="73152" marR="73152">
                     <a:lnL w="9525" cap="flat" cmpd="sng" algn="ctr">
                       <a:solidFill>
-                        <a:srgbClr val="D6E5EA"/>
+                        <a:srgbClr val="D5EEF6"/>
                       </a:solidFill>
                       <a:prstDash val="solid"/>
                     </a:lnL>
                     <a:lnR w="9525" cap="flat" cmpd="sng" algn="ctr">
                       <a:solidFill>
-                        <a:srgbClr val="D6E5EA"/>
+                        <a:srgbClr val="D5EEF6"/>
                       </a:solidFill>
                       <a:prstDash val="solid"/>
                     </a:lnR>
                     <a:lnT w="9525" cap="flat" cmpd="sng" algn="ctr">
                       <a:solidFill>
-                        <a:srgbClr val="D6E5EA"/>
+                        <a:srgbClr val="D5EEF6"/>
                       </a:solidFill>
                       <a:prstDash val="solid"/>
                     </a:lnT>
                     <a:lnB w="9525" cap="flat" cmpd="sng" algn="ctr">
                       <a:solidFill>
-                        <a:srgbClr val="D6E5EA"/>
+                        <a:srgbClr val="D5EEF6"/>
                       </a:solidFill>
                       <a:prstDash val="solid"/>
                     </a:lnB>
                     <a:solidFill>
-                      <a:srgbClr val="F2F6F8"/>
+                      <a:srgbClr val="ECF7FB"/>
                     </a:solidFill>
                   </a:tcPr>
                 </a:tc>
@@ -6466,7 +6840,7 @@
                       <a:r>
                         <a:rPr sz="1400" b="1">
                           <a:solidFill>
-                            <a:srgbClr val="253A41"/>
+                            <a:srgbClr val="274149"/>
                           </a:solidFill>
                         </a:rPr>
                         <a:t>암</a:t>
@@ -6476,30 +6850,30 @@
                   <a:tcPr anchor="ctr" marL="73152" marR="73152">
                     <a:lnL w="9525" cap="flat" cmpd="sng" algn="ctr">
                       <a:solidFill>
-                        <a:srgbClr val="D6E5EA"/>
+                        <a:srgbClr val="D5EEF6"/>
                       </a:solidFill>
                       <a:prstDash val="solid"/>
                     </a:lnL>
                     <a:lnR w="9525" cap="flat" cmpd="sng" algn="ctr">
                       <a:solidFill>
-                        <a:srgbClr val="D6E5EA"/>
+                        <a:srgbClr val="D5EEF6"/>
                       </a:solidFill>
                       <a:prstDash val="solid"/>
                     </a:lnR>
                     <a:lnT w="9525" cap="flat" cmpd="sng" algn="ctr">
                       <a:solidFill>
-                        <a:srgbClr val="D6E5EA"/>
+                        <a:srgbClr val="D5EEF6"/>
                       </a:solidFill>
                       <a:prstDash val="solid"/>
                     </a:lnT>
                     <a:lnB w="9525" cap="flat" cmpd="sng" algn="ctr">
                       <a:solidFill>
-                        <a:srgbClr val="D6E5EA"/>
+                        <a:srgbClr val="D5EEF6"/>
                       </a:solidFill>
                       <a:prstDash val="solid"/>
                     </a:lnB>
                     <a:solidFill>
-                      <a:srgbClr val="D6E5EA"/>
+                      <a:srgbClr val="D5EEF6"/>
                     </a:solidFill>
                   </a:tcPr>
                 </a:tc>
@@ -6512,7 +6886,7 @@
                       <a:r>
                         <a:rPr sz="1400" b="0">
                           <a:solidFill>
-                            <a:srgbClr val="2B2B2B"/>
+                            <a:srgbClr val="26231F"/>
                           </a:solidFill>
                         </a:rPr>
                         <a:t>□</a:t>
@@ -6522,25 +6896,25 @@
                   <a:tcPr anchor="ctr" marL="73152" marR="73152">
                     <a:lnL w="9525" cap="flat" cmpd="sng" algn="ctr">
                       <a:solidFill>
-                        <a:srgbClr val="D6E5EA"/>
+                        <a:srgbClr val="D5EEF6"/>
                       </a:solidFill>
                       <a:prstDash val="solid"/>
                     </a:lnL>
                     <a:lnR w="9525" cap="flat" cmpd="sng" algn="ctr">
                       <a:solidFill>
-                        <a:srgbClr val="D6E5EA"/>
+                        <a:srgbClr val="D5EEF6"/>
                       </a:solidFill>
                       <a:prstDash val="solid"/>
                     </a:lnR>
                     <a:lnT w="9525" cap="flat" cmpd="sng" algn="ctr">
                       <a:solidFill>
-                        <a:srgbClr val="D6E5EA"/>
+                        <a:srgbClr val="D5EEF6"/>
                       </a:solidFill>
                       <a:prstDash val="solid"/>
                     </a:lnT>
                     <a:lnB w="9525" cap="flat" cmpd="sng" algn="ctr">
                       <a:solidFill>
-                        <a:srgbClr val="D6E5EA"/>
+                        <a:srgbClr val="D5EEF6"/>
                       </a:solidFill>
                       <a:prstDash val="solid"/>
                     </a:lnB>
@@ -6558,7 +6932,7 @@
                       <a:r>
                         <a:rPr sz="1400" b="0">
                           <a:solidFill>
-                            <a:srgbClr val="2B2B2B"/>
+                            <a:srgbClr val="26231F"/>
                           </a:solidFill>
                         </a:rPr>
                         <a:t>□</a:t>
@@ -6568,25 +6942,25 @@
                   <a:tcPr anchor="ctr" marL="73152" marR="73152">
                     <a:lnL w="9525" cap="flat" cmpd="sng" algn="ctr">
                       <a:solidFill>
-                        <a:srgbClr val="D6E5EA"/>
+                        <a:srgbClr val="D5EEF6"/>
                       </a:solidFill>
                       <a:prstDash val="solid"/>
                     </a:lnL>
                     <a:lnR w="9525" cap="flat" cmpd="sng" algn="ctr">
                       <a:solidFill>
-                        <a:srgbClr val="D6E5EA"/>
+                        <a:srgbClr val="D5EEF6"/>
                       </a:solidFill>
                       <a:prstDash val="solid"/>
                     </a:lnR>
                     <a:lnT w="9525" cap="flat" cmpd="sng" algn="ctr">
                       <a:solidFill>
-                        <a:srgbClr val="D6E5EA"/>
+                        <a:srgbClr val="D5EEF6"/>
                       </a:solidFill>
                       <a:prstDash val="solid"/>
                     </a:lnT>
                     <a:lnB w="9525" cap="flat" cmpd="sng" algn="ctr">
                       <a:solidFill>
-                        <a:srgbClr val="D6E5EA"/>
+                        <a:srgbClr val="D5EEF6"/>
                       </a:solidFill>
                       <a:prstDash val="solid"/>
                     </a:lnB>
@@ -6604,7 +6978,7 @@
                       <a:r>
                         <a:rPr sz="1400" b="0">
                           <a:solidFill>
-                            <a:srgbClr val="2B2B2B"/>
+                            <a:srgbClr val="26231F"/>
                           </a:solidFill>
                         </a:rPr>
                         <a:t>□</a:t>
@@ -6614,25 +6988,25 @@
                   <a:tcPr anchor="ctr" marL="73152" marR="73152">
                     <a:lnL w="9525" cap="flat" cmpd="sng" algn="ctr">
                       <a:solidFill>
-                        <a:srgbClr val="D6E5EA"/>
+                        <a:srgbClr val="D5EEF6"/>
                       </a:solidFill>
                       <a:prstDash val="solid"/>
                     </a:lnL>
                     <a:lnR w="9525" cap="flat" cmpd="sng" algn="ctr">
                       <a:solidFill>
-                        <a:srgbClr val="D6E5EA"/>
+                        <a:srgbClr val="D5EEF6"/>
                       </a:solidFill>
                       <a:prstDash val="solid"/>
                     </a:lnR>
                     <a:lnT w="9525" cap="flat" cmpd="sng" algn="ctr">
                       <a:solidFill>
-                        <a:srgbClr val="D6E5EA"/>
+                        <a:srgbClr val="D5EEF6"/>
                       </a:solidFill>
                       <a:prstDash val="solid"/>
                     </a:lnT>
                     <a:lnB w="9525" cap="flat" cmpd="sng" algn="ctr">
                       <a:solidFill>
-                        <a:srgbClr val="D6E5EA"/>
+                        <a:srgbClr val="D5EEF6"/>
                       </a:solidFill>
                       <a:prstDash val="solid"/>
                     </a:lnB>
@@ -6652,7 +7026,7 @@
                       <a:r>
                         <a:rPr sz="1400" b="1">
                           <a:solidFill>
-                            <a:srgbClr val="253A41"/>
+                            <a:srgbClr val="274149"/>
                           </a:solidFill>
                         </a:rPr>
                         <a:t>뇌·심장</a:t>
@@ -6662,30 +7036,30 @@
                   <a:tcPr anchor="ctr" marL="73152" marR="73152">
                     <a:lnL w="9525" cap="flat" cmpd="sng" algn="ctr">
                       <a:solidFill>
-                        <a:srgbClr val="D6E5EA"/>
+                        <a:srgbClr val="D5EEF6"/>
                       </a:solidFill>
                       <a:prstDash val="solid"/>
                     </a:lnL>
                     <a:lnR w="9525" cap="flat" cmpd="sng" algn="ctr">
                       <a:solidFill>
-                        <a:srgbClr val="D6E5EA"/>
+                        <a:srgbClr val="D5EEF6"/>
                       </a:solidFill>
                       <a:prstDash val="solid"/>
                     </a:lnR>
                     <a:lnT w="9525" cap="flat" cmpd="sng" algn="ctr">
                       <a:solidFill>
-                        <a:srgbClr val="D6E5EA"/>
+                        <a:srgbClr val="D5EEF6"/>
                       </a:solidFill>
                       <a:prstDash val="solid"/>
                     </a:lnT>
                     <a:lnB w="9525" cap="flat" cmpd="sng" algn="ctr">
                       <a:solidFill>
-                        <a:srgbClr val="D6E5EA"/>
+                        <a:srgbClr val="D5EEF6"/>
                       </a:solidFill>
                       <a:prstDash val="solid"/>
                     </a:lnB>
                     <a:solidFill>
-                      <a:srgbClr val="D6E5EA"/>
+                      <a:srgbClr val="D5EEF6"/>
                     </a:solidFill>
                   </a:tcPr>
                 </a:tc>
@@ -6698,7 +7072,7 @@
                       <a:r>
                         <a:rPr sz="1400" b="0">
                           <a:solidFill>
-                            <a:srgbClr val="2B2B2B"/>
+                            <a:srgbClr val="26231F"/>
                           </a:solidFill>
                         </a:rPr>
                         <a:t>□</a:t>
@@ -6708,30 +7082,30 @@
                   <a:tcPr anchor="ctr" marL="73152" marR="73152">
                     <a:lnL w="9525" cap="flat" cmpd="sng" algn="ctr">
                       <a:solidFill>
-                        <a:srgbClr val="D6E5EA"/>
+                        <a:srgbClr val="D5EEF6"/>
                       </a:solidFill>
                       <a:prstDash val="solid"/>
                     </a:lnL>
                     <a:lnR w="9525" cap="flat" cmpd="sng" algn="ctr">
                       <a:solidFill>
-                        <a:srgbClr val="D6E5EA"/>
+                        <a:srgbClr val="D5EEF6"/>
                       </a:solidFill>
                       <a:prstDash val="solid"/>
                     </a:lnR>
                     <a:lnT w="9525" cap="flat" cmpd="sng" algn="ctr">
                       <a:solidFill>
-                        <a:srgbClr val="D6E5EA"/>
+                        <a:srgbClr val="D5EEF6"/>
                       </a:solidFill>
                       <a:prstDash val="solid"/>
                     </a:lnT>
                     <a:lnB w="9525" cap="flat" cmpd="sng" algn="ctr">
                       <a:solidFill>
-                        <a:srgbClr val="D6E5EA"/>
+                        <a:srgbClr val="D5EEF6"/>
                       </a:solidFill>
                       <a:prstDash val="solid"/>
                     </a:lnB>
                     <a:solidFill>
-                      <a:srgbClr val="F2F6F8"/>
+                      <a:srgbClr val="ECF7FB"/>
                     </a:solidFill>
                   </a:tcPr>
                 </a:tc>
@@ -6744,7 +7118,7 @@
                       <a:r>
                         <a:rPr sz="1400" b="0">
                           <a:solidFill>
-                            <a:srgbClr val="2B2B2B"/>
+                            <a:srgbClr val="26231F"/>
                           </a:solidFill>
                         </a:rPr>
                         <a:t>□</a:t>
@@ -6754,30 +7128,30 @@
                   <a:tcPr anchor="ctr" marL="73152" marR="73152">
                     <a:lnL w="9525" cap="flat" cmpd="sng" algn="ctr">
                       <a:solidFill>
-                        <a:srgbClr val="D6E5EA"/>
+                        <a:srgbClr val="D5EEF6"/>
                       </a:solidFill>
                       <a:prstDash val="solid"/>
                     </a:lnL>
                     <a:lnR w="9525" cap="flat" cmpd="sng" algn="ctr">
                       <a:solidFill>
-                        <a:srgbClr val="D6E5EA"/>
+                        <a:srgbClr val="D5EEF6"/>
                       </a:solidFill>
                       <a:prstDash val="solid"/>
                     </a:lnR>
                     <a:lnT w="9525" cap="flat" cmpd="sng" algn="ctr">
                       <a:solidFill>
-                        <a:srgbClr val="D6E5EA"/>
+                        <a:srgbClr val="D5EEF6"/>
                       </a:solidFill>
                       <a:prstDash val="solid"/>
                     </a:lnT>
                     <a:lnB w="9525" cap="flat" cmpd="sng" algn="ctr">
                       <a:solidFill>
-                        <a:srgbClr val="D6E5EA"/>
+                        <a:srgbClr val="D5EEF6"/>
                       </a:solidFill>
                       <a:prstDash val="solid"/>
                     </a:lnB>
                     <a:solidFill>
-                      <a:srgbClr val="F2F6F8"/>
+                      <a:srgbClr val="ECF7FB"/>
                     </a:solidFill>
                   </a:tcPr>
                 </a:tc>
@@ -6790,7 +7164,7 @@
                       <a:r>
                         <a:rPr sz="1400" b="0">
                           <a:solidFill>
-                            <a:srgbClr val="2B2B2B"/>
+                            <a:srgbClr val="26231F"/>
                           </a:solidFill>
                         </a:rPr>
                         <a:t>□</a:t>
@@ -6800,30 +7174,30 @@
                   <a:tcPr anchor="ctr" marL="73152" marR="73152">
                     <a:lnL w="9525" cap="flat" cmpd="sng" algn="ctr">
                       <a:solidFill>
-                        <a:srgbClr val="D6E5EA"/>
+                        <a:srgbClr val="D5EEF6"/>
                       </a:solidFill>
                       <a:prstDash val="solid"/>
                     </a:lnL>
                     <a:lnR w="9525" cap="flat" cmpd="sng" algn="ctr">
                       <a:solidFill>
-                        <a:srgbClr val="D6E5EA"/>
+                        <a:srgbClr val="D5EEF6"/>
                       </a:solidFill>
                       <a:prstDash val="solid"/>
                     </a:lnR>
                     <a:lnT w="9525" cap="flat" cmpd="sng" algn="ctr">
                       <a:solidFill>
-                        <a:srgbClr val="D6E5EA"/>
+                        <a:srgbClr val="D5EEF6"/>
                       </a:solidFill>
                       <a:prstDash val="solid"/>
                     </a:lnT>
                     <a:lnB w="9525" cap="flat" cmpd="sng" algn="ctr">
                       <a:solidFill>
-                        <a:srgbClr val="D6E5EA"/>
+                        <a:srgbClr val="D5EEF6"/>
                       </a:solidFill>
                       <a:prstDash val="solid"/>
                     </a:lnB>
                     <a:solidFill>
-                      <a:srgbClr val="F2F6F8"/>
+                      <a:srgbClr val="ECF7FB"/>
                     </a:solidFill>
                   </a:tcPr>
                 </a:tc>
@@ -6838,7 +7212,7 @@
                       <a:r>
                         <a:rPr sz="1400" b="1">
                           <a:solidFill>
-                            <a:srgbClr val="253A41"/>
+                            <a:srgbClr val="274149"/>
                           </a:solidFill>
                         </a:rPr>
                         <a:t>입원·수술</a:t>
@@ -6848,30 +7222,30 @@
                   <a:tcPr anchor="ctr" marL="73152" marR="73152">
                     <a:lnL w="9525" cap="flat" cmpd="sng" algn="ctr">
                       <a:solidFill>
-                        <a:srgbClr val="D6E5EA"/>
+                        <a:srgbClr val="D5EEF6"/>
                       </a:solidFill>
                       <a:prstDash val="solid"/>
                     </a:lnL>
                     <a:lnR w="9525" cap="flat" cmpd="sng" algn="ctr">
                       <a:solidFill>
-                        <a:srgbClr val="D6E5EA"/>
+                        <a:srgbClr val="D5EEF6"/>
                       </a:solidFill>
                       <a:prstDash val="solid"/>
                     </a:lnR>
                     <a:lnT w="9525" cap="flat" cmpd="sng" algn="ctr">
                       <a:solidFill>
-                        <a:srgbClr val="D6E5EA"/>
+                        <a:srgbClr val="D5EEF6"/>
                       </a:solidFill>
                       <a:prstDash val="solid"/>
                     </a:lnT>
                     <a:lnB w="9525" cap="flat" cmpd="sng" algn="ctr">
                       <a:solidFill>
-                        <a:srgbClr val="D6E5EA"/>
+                        <a:srgbClr val="D5EEF6"/>
                       </a:solidFill>
                       <a:prstDash val="solid"/>
                     </a:lnB>
                     <a:solidFill>
-                      <a:srgbClr val="D6E5EA"/>
+                      <a:srgbClr val="D5EEF6"/>
                     </a:solidFill>
                   </a:tcPr>
                 </a:tc>
@@ -6884,7 +7258,7 @@
                       <a:r>
                         <a:rPr sz="1400" b="0">
                           <a:solidFill>
-                            <a:srgbClr val="2B2B2B"/>
+                            <a:srgbClr val="26231F"/>
                           </a:solidFill>
                         </a:rPr>
                         <a:t>□</a:t>
@@ -6894,25 +7268,25 @@
                   <a:tcPr anchor="ctr" marL="73152" marR="73152">
                     <a:lnL w="9525" cap="flat" cmpd="sng" algn="ctr">
                       <a:solidFill>
-                        <a:srgbClr val="D6E5EA"/>
+                        <a:srgbClr val="D5EEF6"/>
                       </a:solidFill>
                       <a:prstDash val="solid"/>
                     </a:lnL>
                     <a:lnR w="9525" cap="flat" cmpd="sng" algn="ctr">
                       <a:solidFill>
-                        <a:srgbClr val="D6E5EA"/>
+                        <a:srgbClr val="D5EEF6"/>
                       </a:solidFill>
                       <a:prstDash val="solid"/>
                     </a:lnR>
                     <a:lnT w="9525" cap="flat" cmpd="sng" algn="ctr">
                       <a:solidFill>
-                        <a:srgbClr val="D6E5EA"/>
+                        <a:srgbClr val="D5EEF6"/>
                       </a:solidFill>
                       <a:prstDash val="solid"/>
                     </a:lnT>
                     <a:lnB w="9525" cap="flat" cmpd="sng" algn="ctr">
                       <a:solidFill>
-                        <a:srgbClr val="D6E5EA"/>
+                        <a:srgbClr val="D5EEF6"/>
                       </a:solidFill>
                       <a:prstDash val="solid"/>
                     </a:lnB>
@@ -6930,7 +7304,7 @@
                       <a:r>
                         <a:rPr sz="1400" b="0">
                           <a:solidFill>
-                            <a:srgbClr val="2B2B2B"/>
+                            <a:srgbClr val="26231F"/>
                           </a:solidFill>
                         </a:rPr>
                         <a:t>□</a:t>
@@ -6940,25 +7314,25 @@
                   <a:tcPr anchor="ctr" marL="73152" marR="73152">
                     <a:lnL w="9525" cap="flat" cmpd="sng" algn="ctr">
                       <a:solidFill>
-                        <a:srgbClr val="D6E5EA"/>
+                        <a:srgbClr val="D5EEF6"/>
                       </a:solidFill>
                       <a:prstDash val="solid"/>
                     </a:lnL>
                     <a:lnR w="9525" cap="flat" cmpd="sng" algn="ctr">
                       <a:solidFill>
-                        <a:srgbClr val="D6E5EA"/>
+                        <a:srgbClr val="D5EEF6"/>
                       </a:solidFill>
                       <a:prstDash val="solid"/>
                     </a:lnR>
                     <a:lnT w="9525" cap="flat" cmpd="sng" algn="ctr">
                       <a:solidFill>
-                        <a:srgbClr val="D6E5EA"/>
+                        <a:srgbClr val="D5EEF6"/>
                       </a:solidFill>
                       <a:prstDash val="solid"/>
                     </a:lnT>
                     <a:lnB w="9525" cap="flat" cmpd="sng" algn="ctr">
                       <a:solidFill>
-                        <a:srgbClr val="D6E5EA"/>
+                        <a:srgbClr val="D5EEF6"/>
                       </a:solidFill>
                       <a:prstDash val="solid"/>
                     </a:lnB>
@@ -6976,7 +7350,7 @@
                       <a:r>
                         <a:rPr sz="1400" b="0">
                           <a:solidFill>
-                            <a:srgbClr val="2B2B2B"/>
+                            <a:srgbClr val="26231F"/>
                           </a:solidFill>
                         </a:rPr>
                         <a:t>□</a:t>
@@ -6986,25 +7360,25 @@
                   <a:tcPr anchor="ctr" marL="73152" marR="73152">
                     <a:lnL w="9525" cap="flat" cmpd="sng" algn="ctr">
                       <a:solidFill>
-                        <a:srgbClr val="D6E5EA"/>
+                        <a:srgbClr val="D5EEF6"/>
                       </a:solidFill>
                       <a:prstDash val="solid"/>
                     </a:lnL>
                     <a:lnR w="9525" cap="flat" cmpd="sng" algn="ctr">
                       <a:solidFill>
-                        <a:srgbClr val="D6E5EA"/>
+                        <a:srgbClr val="D5EEF6"/>
                       </a:solidFill>
                       <a:prstDash val="solid"/>
                     </a:lnR>
                     <a:lnT w="9525" cap="flat" cmpd="sng" algn="ctr">
                       <a:solidFill>
-                        <a:srgbClr val="D6E5EA"/>
+                        <a:srgbClr val="D5EEF6"/>
                       </a:solidFill>
                       <a:prstDash val="solid"/>
                     </a:lnT>
                     <a:lnB w="9525" cap="flat" cmpd="sng" algn="ctr">
                       <a:solidFill>
-                        <a:srgbClr val="D6E5EA"/>
+                        <a:srgbClr val="D5EEF6"/>
                       </a:solidFill>
                       <a:prstDash val="solid"/>
                     </a:lnB>
@@ -7024,7 +7398,7 @@
                       <a:r>
                         <a:rPr sz="1400" b="1">
                           <a:solidFill>
-                            <a:srgbClr val="253A41"/>
+                            <a:srgbClr val="274149"/>
                           </a:solidFill>
                         </a:rPr>
                         <a:t>상해</a:t>
@@ -7034,30 +7408,30 @@
                   <a:tcPr anchor="ctr" marL="73152" marR="73152">
                     <a:lnL w="9525" cap="flat" cmpd="sng" algn="ctr">
                       <a:solidFill>
-                        <a:srgbClr val="D6E5EA"/>
+                        <a:srgbClr val="D5EEF6"/>
                       </a:solidFill>
                       <a:prstDash val="solid"/>
                     </a:lnL>
                     <a:lnR w="9525" cap="flat" cmpd="sng" algn="ctr">
                       <a:solidFill>
-                        <a:srgbClr val="D6E5EA"/>
+                        <a:srgbClr val="D5EEF6"/>
                       </a:solidFill>
                       <a:prstDash val="solid"/>
                     </a:lnR>
                     <a:lnT w="9525" cap="flat" cmpd="sng" algn="ctr">
                       <a:solidFill>
-                        <a:srgbClr val="D6E5EA"/>
+                        <a:srgbClr val="D5EEF6"/>
                       </a:solidFill>
                       <a:prstDash val="solid"/>
                     </a:lnT>
                     <a:lnB w="9525" cap="flat" cmpd="sng" algn="ctr">
                       <a:solidFill>
-                        <a:srgbClr val="D6E5EA"/>
+                        <a:srgbClr val="D5EEF6"/>
                       </a:solidFill>
                       <a:prstDash val="solid"/>
                     </a:lnB>
                     <a:solidFill>
-                      <a:srgbClr val="D6E5EA"/>
+                      <a:srgbClr val="D5EEF6"/>
                     </a:solidFill>
                   </a:tcPr>
                 </a:tc>
@@ -7070,7 +7444,7 @@
                       <a:r>
                         <a:rPr sz="1400" b="0">
                           <a:solidFill>
-                            <a:srgbClr val="2B2B2B"/>
+                            <a:srgbClr val="26231F"/>
                           </a:solidFill>
                         </a:rPr>
                         <a:t>□</a:t>
@@ -7080,30 +7454,30 @@
                   <a:tcPr anchor="ctr" marL="73152" marR="73152">
                     <a:lnL w="9525" cap="flat" cmpd="sng" algn="ctr">
                       <a:solidFill>
-                        <a:srgbClr val="D6E5EA"/>
+                        <a:srgbClr val="D5EEF6"/>
                       </a:solidFill>
                       <a:prstDash val="solid"/>
                     </a:lnL>
                     <a:lnR w="9525" cap="flat" cmpd="sng" algn="ctr">
                       <a:solidFill>
-                        <a:srgbClr val="D6E5EA"/>
+                        <a:srgbClr val="D5EEF6"/>
                       </a:solidFill>
                       <a:prstDash val="solid"/>
                     </a:lnR>
                     <a:lnT w="9525" cap="flat" cmpd="sng" algn="ctr">
                       <a:solidFill>
-                        <a:srgbClr val="D6E5EA"/>
+                        <a:srgbClr val="D5EEF6"/>
                       </a:solidFill>
                       <a:prstDash val="solid"/>
                     </a:lnT>
                     <a:lnB w="9525" cap="flat" cmpd="sng" algn="ctr">
                       <a:solidFill>
-                        <a:srgbClr val="D6E5EA"/>
+                        <a:srgbClr val="D5EEF6"/>
                       </a:solidFill>
                       <a:prstDash val="solid"/>
                     </a:lnB>
                     <a:solidFill>
-                      <a:srgbClr val="F2F6F8"/>
+                      <a:srgbClr val="ECF7FB"/>
                     </a:solidFill>
                   </a:tcPr>
                 </a:tc>
@@ -7116,7 +7490,7 @@
                       <a:r>
                         <a:rPr sz="1400" b="0">
                           <a:solidFill>
-                            <a:srgbClr val="2B2B2B"/>
+                            <a:srgbClr val="26231F"/>
                           </a:solidFill>
                         </a:rPr>
                         <a:t>□</a:t>
@@ -7126,30 +7500,30 @@
                   <a:tcPr anchor="ctr" marL="73152" marR="73152">
                     <a:lnL w="9525" cap="flat" cmpd="sng" algn="ctr">
                       <a:solidFill>
-                        <a:srgbClr val="D6E5EA"/>
+                        <a:srgbClr val="D5EEF6"/>
                       </a:solidFill>
                       <a:prstDash val="solid"/>
                     </a:lnL>
                     <a:lnR w="9525" cap="flat" cmpd="sng" algn="ctr">
                       <a:solidFill>
-                        <a:srgbClr val="D6E5EA"/>
+                        <a:srgbClr val="D5EEF6"/>
                       </a:solidFill>
                       <a:prstDash val="solid"/>
                     </a:lnR>
                     <a:lnT w="9525" cap="flat" cmpd="sng" algn="ctr">
                       <a:solidFill>
-                        <a:srgbClr val="D6E5EA"/>
+                        <a:srgbClr val="D5EEF6"/>
                       </a:solidFill>
                       <a:prstDash val="solid"/>
                     </a:lnT>
                     <a:lnB w="9525" cap="flat" cmpd="sng" algn="ctr">
                       <a:solidFill>
-                        <a:srgbClr val="D6E5EA"/>
+                        <a:srgbClr val="D5EEF6"/>
                       </a:solidFill>
                       <a:prstDash val="solid"/>
                     </a:lnB>
                     <a:solidFill>
-                      <a:srgbClr val="F2F6F8"/>
+                      <a:srgbClr val="ECF7FB"/>
                     </a:solidFill>
                   </a:tcPr>
                 </a:tc>
@@ -7162,7 +7536,7 @@
                       <a:r>
                         <a:rPr sz="1400" b="0">
                           <a:solidFill>
-                            <a:srgbClr val="2B2B2B"/>
+                            <a:srgbClr val="26231F"/>
                           </a:solidFill>
                         </a:rPr>
                         <a:t>□</a:t>
@@ -7172,30 +7546,30 @@
                   <a:tcPr anchor="ctr" marL="73152" marR="73152">
                     <a:lnL w="9525" cap="flat" cmpd="sng" algn="ctr">
                       <a:solidFill>
-                        <a:srgbClr val="D6E5EA"/>
+                        <a:srgbClr val="D5EEF6"/>
                       </a:solidFill>
                       <a:prstDash val="solid"/>
                     </a:lnL>
                     <a:lnR w="9525" cap="flat" cmpd="sng" algn="ctr">
                       <a:solidFill>
-                        <a:srgbClr val="D6E5EA"/>
+                        <a:srgbClr val="D5EEF6"/>
                       </a:solidFill>
                       <a:prstDash val="solid"/>
                     </a:lnR>
                     <a:lnT w="9525" cap="flat" cmpd="sng" algn="ctr">
                       <a:solidFill>
-                        <a:srgbClr val="D6E5EA"/>
+                        <a:srgbClr val="D5EEF6"/>
                       </a:solidFill>
                       <a:prstDash val="solid"/>
                     </a:lnT>
                     <a:lnB w="9525" cap="flat" cmpd="sng" algn="ctr">
                       <a:solidFill>
-                        <a:srgbClr val="D6E5EA"/>
+                        <a:srgbClr val="D5EEF6"/>
                       </a:solidFill>
                       <a:prstDash val="solid"/>
                     </a:lnB>
                     <a:solidFill>
-                      <a:srgbClr val="F2F6F8"/>
+                      <a:srgbClr val="ECF7FB"/>
                     </a:solidFill>
                   </a:tcPr>
                 </a:tc>
@@ -7210,7 +7584,7 @@
                       <a:r>
                         <a:rPr sz="1400" b="1">
                           <a:solidFill>
-                            <a:srgbClr val="253A41"/>
+                            <a:srgbClr val="274149"/>
                           </a:solidFill>
                         </a:rPr>
                         <a:t>실손의료</a:t>
@@ -7220,30 +7594,30 @@
                   <a:tcPr anchor="ctr" marL="73152" marR="73152">
                     <a:lnL w="9525" cap="flat" cmpd="sng" algn="ctr">
                       <a:solidFill>
-                        <a:srgbClr val="D6E5EA"/>
+                        <a:srgbClr val="D5EEF6"/>
                       </a:solidFill>
                       <a:prstDash val="solid"/>
                     </a:lnL>
                     <a:lnR w="9525" cap="flat" cmpd="sng" algn="ctr">
                       <a:solidFill>
-                        <a:srgbClr val="D6E5EA"/>
+                        <a:srgbClr val="D5EEF6"/>
                       </a:solidFill>
                       <a:prstDash val="solid"/>
                     </a:lnR>
                     <a:lnT w="9525" cap="flat" cmpd="sng" algn="ctr">
                       <a:solidFill>
-                        <a:srgbClr val="D6E5EA"/>
+                        <a:srgbClr val="D5EEF6"/>
                       </a:solidFill>
                       <a:prstDash val="solid"/>
                     </a:lnT>
                     <a:lnB w="9525" cap="flat" cmpd="sng" algn="ctr">
                       <a:solidFill>
-                        <a:srgbClr val="D6E5EA"/>
+                        <a:srgbClr val="D5EEF6"/>
                       </a:solidFill>
                       <a:prstDash val="solid"/>
                     </a:lnB>
                     <a:solidFill>
-                      <a:srgbClr val="D6E5EA"/>
+                      <a:srgbClr val="D5EEF6"/>
                     </a:solidFill>
                   </a:tcPr>
                 </a:tc>
@@ -7256,7 +7630,7 @@
                       <a:r>
                         <a:rPr sz="1400" b="0">
                           <a:solidFill>
-                            <a:srgbClr val="2B2B2B"/>
+                            <a:srgbClr val="26231F"/>
                           </a:solidFill>
                         </a:rPr>
                         <a:t>□</a:t>
@@ -7266,25 +7640,25 @@
                   <a:tcPr anchor="ctr" marL="73152" marR="73152">
                     <a:lnL w="9525" cap="flat" cmpd="sng" algn="ctr">
                       <a:solidFill>
-                        <a:srgbClr val="D6E5EA"/>
+                        <a:srgbClr val="D5EEF6"/>
                       </a:solidFill>
                       <a:prstDash val="solid"/>
                     </a:lnL>
                     <a:lnR w="9525" cap="flat" cmpd="sng" algn="ctr">
                       <a:solidFill>
-                        <a:srgbClr val="D6E5EA"/>
+                        <a:srgbClr val="D5EEF6"/>
                       </a:solidFill>
                       <a:prstDash val="solid"/>
                     </a:lnR>
                     <a:lnT w="9525" cap="flat" cmpd="sng" algn="ctr">
                       <a:solidFill>
-                        <a:srgbClr val="D6E5EA"/>
+                        <a:srgbClr val="D5EEF6"/>
                       </a:solidFill>
                       <a:prstDash val="solid"/>
                     </a:lnT>
                     <a:lnB w="9525" cap="flat" cmpd="sng" algn="ctr">
                       <a:solidFill>
-                        <a:srgbClr val="D6E5EA"/>
+                        <a:srgbClr val="D5EEF6"/>
                       </a:solidFill>
                       <a:prstDash val="solid"/>
                     </a:lnB>
@@ -7302,7 +7676,7 @@
                       <a:r>
                         <a:rPr sz="1400" b="0">
                           <a:solidFill>
-                            <a:srgbClr val="2B2B2B"/>
+                            <a:srgbClr val="26231F"/>
                           </a:solidFill>
                         </a:rPr>
                         <a:t>□</a:t>
@@ -7312,25 +7686,25 @@
                   <a:tcPr anchor="ctr" marL="73152" marR="73152">
                     <a:lnL w="9525" cap="flat" cmpd="sng" algn="ctr">
                       <a:solidFill>
-                        <a:srgbClr val="D6E5EA"/>
+                        <a:srgbClr val="D5EEF6"/>
                       </a:solidFill>
                       <a:prstDash val="solid"/>
                     </a:lnL>
                     <a:lnR w="9525" cap="flat" cmpd="sng" algn="ctr">
                       <a:solidFill>
-                        <a:srgbClr val="D6E5EA"/>
+                        <a:srgbClr val="D5EEF6"/>
                       </a:solidFill>
                       <a:prstDash val="solid"/>
                     </a:lnR>
                     <a:lnT w="9525" cap="flat" cmpd="sng" algn="ctr">
                       <a:solidFill>
-                        <a:srgbClr val="D6E5EA"/>
+                        <a:srgbClr val="D5EEF6"/>
                       </a:solidFill>
                       <a:prstDash val="solid"/>
                     </a:lnT>
                     <a:lnB w="9525" cap="flat" cmpd="sng" algn="ctr">
                       <a:solidFill>
-                        <a:srgbClr val="D6E5EA"/>
+                        <a:srgbClr val="D5EEF6"/>
                       </a:solidFill>
                       <a:prstDash val="solid"/>
                     </a:lnB>
@@ -7348,7 +7722,7 @@
                       <a:r>
                         <a:rPr sz="1400" b="0">
                           <a:solidFill>
-                            <a:srgbClr val="2B2B2B"/>
+                            <a:srgbClr val="26231F"/>
                           </a:solidFill>
                         </a:rPr>
                         <a:t>□</a:t>
@@ -7358,25 +7732,25 @@
                   <a:tcPr anchor="ctr" marL="73152" marR="73152">
                     <a:lnL w="9525" cap="flat" cmpd="sng" algn="ctr">
                       <a:solidFill>
-                        <a:srgbClr val="D6E5EA"/>
+                        <a:srgbClr val="D5EEF6"/>
                       </a:solidFill>
                       <a:prstDash val="solid"/>
                     </a:lnL>
                     <a:lnR w="9525" cap="flat" cmpd="sng" algn="ctr">
                       <a:solidFill>
-                        <a:srgbClr val="D6E5EA"/>
+                        <a:srgbClr val="D5EEF6"/>
                       </a:solidFill>
                       <a:prstDash val="solid"/>
                     </a:lnR>
                     <a:lnT w="9525" cap="flat" cmpd="sng" algn="ctr">
                       <a:solidFill>
-                        <a:srgbClr val="D6E5EA"/>
+                        <a:srgbClr val="D5EEF6"/>
                       </a:solidFill>
                       <a:prstDash val="solid"/>
                     </a:lnT>
                     <a:lnB w="9525" cap="flat" cmpd="sng" algn="ctr">
                       <a:solidFill>
-                        <a:srgbClr val="D6E5EA"/>
+                        <a:srgbClr val="D5EEF6"/>
                       </a:solidFill>
                       <a:prstDash val="solid"/>
                     </a:lnB>
@@ -7396,7 +7770,7 @@
                       <a:r>
                         <a:rPr sz="1400" b="1">
                           <a:solidFill>
-                            <a:srgbClr val="253A41"/>
+                            <a:srgbClr val="274149"/>
                           </a:solidFill>
                         </a:rPr>
                         <a:t>연금·노후자금</a:t>
@@ -7406,30 +7780,30 @@
                   <a:tcPr anchor="ctr" marL="73152" marR="73152">
                     <a:lnL w="9525" cap="flat" cmpd="sng" algn="ctr">
                       <a:solidFill>
-                        <a:srgbClr val="D6E5EA"/>
+                        <a:srgbClr val="D5EEF6"/>
                       </a:solidFill>
                       <a:prstDash val="solid"/>
                     </a:lnL>
                     <a:lnR w="9525" cap="flat" cmpd="sng" algn="ctr">
                       <a:solidFill>
-                        <a:srgbClr val="D6E5EA"/>
+                        <a:srgbClr val="D5EEF6"/>
                       </a:solidFill>
                       <a:prstDash val="solid"/>
                     </a:lnR>
                     <a:lnT w="9525" cap="flat" cmpd="sng" algn="ctr">
                       <a:solidFill>
-                        <a:srgbClr val="D6E5EA"/>
+                        <a:srgbClr val="D5EEF6"/>
                       </a:solidFill>
                       <a:prstDash val="solid"/>
                     </a:lnT>
                     <a:lnB w="9525" cap="flat" cmpd="sng" algn="ctr">
                       <a:solidFill>
-                        <a:srgbClr val="D6E5EA"/>
+                        <a:srgbClr val="D5EEF6"/>
                       </a:solidFill>
                       <a:prstDash val="solid"/>
                     </a:lnB>
                     <a:solidFill>
-                      <a:srgbClr val="D6E5EA"/>
+                      <a:srgbClr val="D5EEF6"/>
                     </a:solidFill>
                   </a:tcPr>
                 </a:tc>
@@ -7442,7 +7816,7 @@
                       <a:r>
                         <a:rPr sz="1400" b="0">
                           <a:solidFill>
-                            <a:srgbClr val="2B2B2B"/>
+                            <a:srgbClr val="26231F"/>
                           </a:solidFill>
                         </a:rPr>
                         <a:t>□</a:t>
@@ -7452,30 +7826,30 @@
                   <a:tcPr anchor="ctr" marL="73152" marR="73152">
                     <a:lnL w="9525" cap="flat" cmpd="sng" algn="ctr">
                       <a:solidFill>
-                        <a:srgbClr val="D6E5EA"/>
+                        <a:srgbClr val="D5EEF6"/>
                       </a:solidFill>
                       <a:prstDash val="solid"/>
                     </a:lnL>
                     <a:lnR w="9525" cap="flat" cmpd="sng" algn="ctr">
                       <a:solidFill>
-                        <a:srgbClr val="D6E5EA"/>
+                        <a:srgbClr val="D5EEF6"/>
                       </a:solidFill>
                       <a:prstDash val="solid"/>
                     </a:lnR>
                     <a:lnT w="9525" cap="flat" cmpd="sng" algn="ctr">
                       <a:solidFill>
-                        <a:srgbClr val="D6E5EA"/>
+                        <a:srgbClr val="D5EEF6"/>
                       </a:solidFill>
                       <a:prstDash val="solid"/>
                     </a:lnT>
                     <a:lnB w="9525" cap="flat" cmpd="sng" algn="ctr">
                       <a:solidFill>
-                        <a:srgbClr val="D6E5EA"/>
+                        <a:srgbClr val="D5EEF6"/>
                       </a:solidFill>
                       <a:prstDash val="solid"/>
                     </a:lnB>
                     <a:solidFill>
-                      <a:srgbClr val="F2F6F8"/>
+                      <a:srgbClr val="ECF7FB"/>
                     </a:solidFill>
                   </a:tcPr>
                 </a:tc>
@@ -7488,7 +7862,7 @@
                       <a:r>
                         <a:rPr sz="1400" b="0">
                           <a:solidFill>
-                            <a:srgbClr val="2B2B2B"/>
+                            <a:srgbClr val="26231F"/>
                           </a:solidFill>
                         </a:rPr>
                         <a:t>□</a:t>
@@ -7498,30 +7872,30 @@
                   <a:tcPr anchor="ctr" marL="73152" marR="73152">
                     <a:lnL w="9525" cap="flat" cmpd="sng" algn="ctr">
                       <a:solidFill>
-                        <a:srgbClr val="D6E5EA"/>
+                        <a:srgbClr val="D5EEF6"/>
                       </a:solidFill>
                       <a:prstDash val="solid"/>
                     </a:lnL>
                     <a:lnR w="9525" cap="flat" cmpd="sng" algn="ctr">
                       <a:solidFill>
-                        <a:srgbClr val="D6E5EA"/>
+                        <a:srgbClr val="D5EEF6"/>
                       </a:solidFill>
                       <a:prstDash val="solid"/>
                     </a:lnR>
                     <a:lnT w="9525" cap="flat" cmpd="sng" algn="ctr">
                       <a:solidFill>
-                        <a:srgbClr val="D6E5EA"/>
+                        <a:srgbClr val="D5EEF6"/>
                       </a:solidFill>
                       <a:prstDash val="solid"/>
                     </a:lnT>
                     <a:lnB w="9525" cap="flat" cmpd="sng" algn="ctr">
                       <a:solidFill>
-                        <a:srgbClr val="D6E5EA"/>
+                        <a:srgbClr val="D5EEF6"/>
                       </a:solidFill>
                       <a:prstDash val="solid"/>
                     </a:lnB>
                     <a:solidFill>
-                      <a:srgbClr val="F2F6F8"/>
+                      <a:srgbClr val="ECF7FB"/>
                     </a:solidFill>
                   </a:tcPr>
                 </a:tc>
@@ -7534,7 +7908,7 @@
                       <a:r>
                         <a:rPr sz="1400" b="0">
                           <a:solidFill>
-                            <a:srgbClr val="2B2B2B"/>
+                            <a:srgbClr val="26231F"/>
                           </a:solidFill>
                         </a:rPr>
                         <a:t>□</a:t>
@@ -7544,30 +7918,30 @@
                   <a:tcPr anchor="ctr" marL="73152" marR="73152">
                     <a:lnL w="9525" cap="flat" cmpd="sng" algn="ctr">
                       <a:solidFill>
-                        <a:srgbClr val="D6E5EA"/>
+                        <a:srgbClr val="D5EEF6"/>
                       </a:solidFill>
                       <a:prstDash val="solid"/>
                     </a:lnL>
                     <a:lnR w="9525" cap="flat" cmpd="sng" algn="ctr">
                       <a:solidFill>
-                        <a:srgbClr val="D6E5EA"/>
+                        <a:srgbClr val="D5EEF6"/>
                       </a:solidFill>
                       <a:prstDash val="solid"/>
                     </a:lnR>
                     <a:lnT w="9525" cap="flat" cmpd="sng" algn="ctr">
                       <a:solidFill>
-                        <a:srgbClr val="D6E5EA"/>
+                        <a:srgbClr val="D5EEF6"/>
                       </a:solidFill>
                       <a:prstDash val="solid"/>
                     </a:lnT>
                     <a:lnB w="9525" cap="flat" cmpd="sng" algn="ctr">
                       <a:solidFill>
-                        <a:srgbClr val="D6E5EA"/>
+                        <a:srgbClr val="D5EEF6"/>
                       </a:solidFill>
                       <a:prstDash val="solid"/>
                     </a:lnB>
                     <a:solidFill>
-                      <a:srgbClr val="F2F6F8"/>
+                      <a:srgbClr val="ECF7FB"/>
                     </a:solidFill>
                   </a:tcPr>
                 </a:tc>
@@ -7610,14 +7984,112 @@
         </p:nvSpPr>
         <p:spPr>
           <a:xfrm>
-            <a:off x="0" y="384048"/>
-            <a:ext cx="9509522" cy="896112"/>
-          </a:xfrm>
-          <a:prstGeom prst="homePlate">
+            <a:off x="0" y="6565392"/>
+            <a:ext cx="12191695" cy="292608"/>
+          </a:xfrm>
+          <a:prstGeom prst="rect">
             <a:avLst/>
           </a:prstGeom>
           <a:solidFill>
-            <a:srgbClr val="497483"/>
+            <a:srgbClr val="ADDBEB"/>
+          </a:solidFill>
+          <a:ln>
+            <a:noFill/>
+          </a:ln>
+        </p:spPr>
+        <p:txBody>
+          <a:bodyPr rtlCol="0" anchor="ctr"/>
+          <a:lstStyle/>
+          <a:p>
+            <a:pPr algn="ctr"/>
+          </a:p>
+        </p:txBody>
+      </p:sp>
+      <p:sp>
+        <p:nvSpPr>
+          <p:cNvPr id="4" name="장식"/>
+          <p:cNvSpPr/>
+          <p:nvPr/>
+        </p:nvSpPr>
+        <p:spPr>
+          <a:xfrm>
+            <a:off x="640080" y="566928"/>
+            <a:ext cx="64008" cy="868680"/>
+          </a:xfrm>
+          <a:prstGeom prst="roundRect">
+            <a:avLst>
+              <a:gd name="adj" fmla="val 50000"/>
+            </a:avLst>
+          </a:prstGeom>
+          <a:solidFill>
+            <a:srgbClr val="98CFE1"/>
+          </a:solidFill>
+          <a:ln>
+            <a:noFill/>
+          </a:ln>
+        </p:spPr>
+        <p:txBody>
+          <a:bodyPr rtlCol="0" anchor="ctr"/>
+          <a:lstStyle/>
+          <a:p>
+            <a:pPr algn="ctr"/>
+          </a:p>
+        </p:txBody>
+      </p:sp>
+      <p:sp>
+        <p:nvSpPr>
+          <p:cNvPr id="5" name="상단 라벨"/>
+          <p:cNvSpPr txBox="1"/>
+          <p:nvPr/>
+        </p:nvSpPr>
+        <p:spPr>
+          <a:xfrm>
+            <a:off x="868680" y="274320"/>
+            <a:ext cx="5486400" cy="274320"/>
+          </a:xfrm>
+          <a:prstGeom prst="rect">
+            <a:avLst/>
+          </a:prstGeom>
+          <a:noFill/>
+        </p:spPr>
+        <p:txBody>
+          <a:bodyPr wrap="square" lIns="54864" rIns="54864" tIns="27432" bIns="27432" anchor="ctr">
+            <a:noAutofit/>
+          </a:bodyPr>
+          <a:lstStyle/>
+          <a:p>
+            <a:pPr algn="l">
+              <a:lnSpc>
+                <a:spcPct val="115000"/>
+              </a:lnSpc>
+            </a:pPr>
+            <a:r>
+              <a:rPr sz="900" b="1" i="0" spc="250">
+                <a:solidFill>
+                  <a:srgbClr val="8E8780"/>
+                </a:solidFill>
+              </a:rPr>
+              <a:t>INSURANCE CHECK</a:t>
+            </a:r>
+          </a:p>
+        </p:txBody>
+      </p:sp>
+      <p:sp>
+        <p:nvSpPr>
+          <p:cNvPr id="6" name="포인트"/>
+          <p:cNvSpPr/>
+          <p:nvPr/>
+        </p:nvSpPr>
+        <p:spPr>
+          <a:xfrm rot="18900000">
+            <a:off x="11167567" y="667512"/>
+            <a:ext cx="310896" cy="310896"/>
+          </a:xfrm>
+          <a:prstGeom prst="teardrop">
+            <a:avLst/>
+          </a:prstGeom>
+          <a:solidFill>
+            <a:srgbClr val="ADDBEB"/>
           </a:solidFill>
           <a:ln>
             <a:noFill/>
@@ -7643,8 +8115,8 @@
         </p:nvSpPr>
         <p:spPr>
           <a:xfrm>
-            <a:off x="640080" y="411480"/>
-            <a:ext cx="8412242" cy="822960"/>
+            <a:off x="868680" y="566928"/>
+            <a:ext cx="9448495" cy="868680"/>
           </a:xfrm>
         </p:spPr>
         <p:txBody>
@@ -7661,7 +8133,7 @@
             <a:r>
               <a:rPr sz="3000" b="1" i="0">
                 <a:solidFill>
-                  <a:srgbClr val="FFFFFF"/>
+                  <a:srgbClr val="26231F"/>
                 </a:solidFill>
               </a:rPr>
               <a:t>월 보험료 한눈에</a:t>
@@ -7671,27 +8143,25 @@
       </p:sp>
       <p:sp>
         <p:nvSpPr>
-          <p:cNvPr id="4" name="카드 1"/>
+          <p:cNvPr id="7" name="카드 1"/>
           <p:cNvSpPr/>
           <p:nvPr/>
         </p:nvSpPr>
         <p:spPr>
           <a:xfrm>
-            <a:off x="640080" y="1645920"/>
+            <a:off x="640080" y="1783080"/>
             <a:ext cx="3484778" cy="2926080"/>
           </a:xfrm>
           <a:prstGeom prst="roundRect">
             <a:avLst>
-              <a:gd name="adj" fmla="val 8000"/>
+              <a:gd name="adj" fmla="val 7000"/>
             </a:avLst>
           </a:prstGeom>
           <a:solidFill>
-            <a:srgbClr val="F2F6F8"/>
+            <a:srgbClr val="ECF7FB"/>
           </a:solidFill>
-          <a:ln w="15875">
-            <a:solidFill>
-              <a:srgbClr val="D6E5EA"/>
-            </a:solidFill>
+          <a:ln>
+            <a:noFill/>
           </a:ln>
         </p:spPr>
         <p:txBody>
@@ -7704,23 +8174,23 @@
       </p:sp>
       <p:sp>
         <p:nvSpPr>
-          <p:cNvPr id="5" name="번호 1"/>
+          <p:cNvPr id="8" name="번호 1"/>
           <p:cNvSpPr/>
           <p:nvPr/>
         </p:nvSpPr>
         <p:spPr>
           <a:xfrm>
-            <a:off x="822959" y="1828800"/>
+            <a:off x="822959" y="1965960"/>
             <a:ext cx="457200" cy="457200"/>
           </a:xfrm>
           <a:prstGeom prst="ellipse">
             <a:avLst/>
           </a:prstGeom>
-          <a:solidFill>
-            <a:srgbClr val="497483"/>
-          </a:solidFill>
-          <a:ln>
-            <a:noFill/>
+          <a:noFill/>
+          <a:ln w="19050">
+            <a:solidFill>
+              <a:srgbClr val="98CFE1"/>
+            </a:solidFill>
           </a:ln>
         </p:spPr>
         <p:txBody>
@@ -7737,7 +8207,7 @@
             <a:r>
               <a:rPr sz="1600" b="1" i="0">
                 <a:solidFill>
-                  <a:srgbClr val="FFFFFF"/>
+                  <a:srgbClr val="274149"/>
                 </a:solidFill>
               </a:rPr>
               <a:t>1</a:t>
@@ -7747,13 +8217,13 @@
       </p:sp>
       <p:sp>
         <p:nvSpPr>
-          <p:cNvPr id="6" name="TextBox 5"/>
+          <p:cNvPr id="9" name="TextBox 8"/>
           <p:cNvSpPr txBox="1"/>
           <p:nvPr/>
         </p:nvSpPr>
         <p:spPr>
           <a:xfrm>
-            <a:off x="777240" y="2423160"/>
+            <a:off x="777240" y="2560320"/>
             <a:ext cx="3210458" cy="640080"/>
           </a:xfrm>
           <a:prstGeom prst="rect">
@@ -7775,7 +8245,7 @@
             <a:r>
               <a:rPr sz="1700" b="1" i="0">
                 <a:solidFill>
-                  <a:srgbClr val="253A41"/>
+                  <a:srgbClr val="274149"/>
                 </a:solidFill>
               </a:rPr>
               <a:t>월 보험료 합계</a:t>
@@ -7785,13 +8255,13 @@
       </p:sp>
       <p:sp>
         <p:nvSpPr>
-          <p:cNvPr id="7" name="TextBox 6"/>
+          <p:cNvPr id="10" name="TextBox 9"/>
           <p:cNvSpPr txBox="1"/>
           <p:nvPr/>
         </p:nvSpPr>
         <p:spPr>
           <a:xfrm>
-            <a:off x="777240" y="3108960"/>
+            <a:off x="777240" y="3246120"/>
             <a:ext cx="3210458" cy="1325880"/>
           </a:xfrm>
           <a:prstGeom prst="rect">
@@ -7813,7 +8283,7 @@
             <a:r>
               <a:rPr sz="3000" b="0" i="0">
                 <a:solidFill>
-                  <a:srgbClr val="2B2B2B"/>
+                  <a:srgbClr val="26231F"/>
                 </a:solidFill>
               </a:rPr>
               <a:t>0원</a:t>
@@ -7823,27 +8293,25 @@
       </p:sp>
       <p:sp>
         <p:nvSpPr>
-          <p:cNvPr id="8" name="카드 2"/>
+          <p:cNvPr id="11" name="카드 2"/>
           <p:cNvSpPr/>
           <p:nvPr/>
         </p:nvSpPr>
         <p:spPr>
           <a:xfrm>
-            <a:off x="4353458" y="1645920"/>
+            <a:off x="4353458" y="1783080"/>
             <a:ext cx="3484778" cy="2926080"/>
           </a:xfrm>
           <a:prstGeom prst="roundRect">
             <a:avLst>
-              <a:gd name="adj" fmla="val 8000"/>
+              <a:gd name="adj" fmla="val 7000"/>
             </a:avLst>
           </a:prstGeom>
           <a:solidFill>
-            <a:srgbClr val="F2F6F8"/>
+            <a:srgbClr val="ECF7FB"/>
           </a:solidFill>
-          <a:ln w="15875">
-            <a:solidFill>
-              <a:srgbClr val="D6E5EA"/>
-            </a:solidFill>
+          <a:ln>
+            <a:noFill/>
           </a:ln>
         </p:spPr>
         <p:txBody>
@@ -7856,23 +8324,23 @@
       </p:sp>
       <p:sp>
         <p:nvSpPr>
-          <p:cNvPr id="9" name="번호 2"/>
+          <p:cNvPr id="12" name="번호 2"/>
           <p:cNvSpPr/>
           <p:nvPr/>
         </p:nvSpPr>
         <p:spPr>
           <a:xfrm>
-            <a:off x="4536338" y="1828800"/>
+            <a:off x="4536338" y="1965960"/>
             <a:ext cx="457200" cy="457200"/>
           </a:xfrm>
           <a:prstGeom prst="ellipse">
             <a:avLst/>
           </a:prstGeom>
-          <a:solidFill>
-            <a:srgbClr val="497483"/>
-          </a:solidFill>
-          <a:ln>
-            <a:noFill/>
+          <a:noFill/>
+          <a:ln w="19050">
+            <a:solidFill>
+              <a:srgbClr val="98CFE1"/>
+            </a:solidFill>
           </a:ln>
         </p:spPr>
         <p:txBody>
@@ -7889,7 +8357,7 @@
             <a:r>
               <a:rPr sz="1600" b="1" i="0">
                 <a:solidFill>
-                  <a:srgbClr val="FFFFFF"/>
+                  <a:srgbClr val="274149"/>
                 </a:solidFill>
               </a:rPr>
               <a:t>2</a:t>
@@ -7899,13 +8367,13 @@
       </p:sp>
       <p:sp>
         <p:nvSpPr>
-          <p:cNvPr id="10" name="TextBox 9"/>
+          <p:cNvPr id="13" name="TextBox 12"/>
           <p:cNvSpPr txBox="1"/>
           <p:nvPr/>
         </p:nvSpPr>
         <p:spPr>
           <a:xfrm>
-            <a:off x="4490618" y="2423160"/>
+            <a:off x="4490618" y="2560320"/>
             <a:ext cx="3210458" cy="640080"/>
           </a:xfrm>
           <a:prstGeom prst="rect">
@@ -7927,7 +8395,7 @@
             <a:r>
               <a:rPr sz="1700" b="1" i="0">
                 <a:solidFill>
-                  <a:srgbClr val="253A41"/>
+                  <a:srgbClr val="274149"/>
                 </a:solidFill>
               </a:rPr>
               <a:t>연 보험료 합계</a:t>
@@ -7937,13 +8405,13 @@
       </p:sp>
       <p:sp>
         <p:nvSpPr>
-          <p:cNvPr id="11" name="TextBox 10"/>
+          <p:cNvPr id="14" name="TextBox 13"/>
           <p:cNvSpPr txBox="1"/>
           <p:nvPr/>
         </p:nvSpPr>
         <p:spPr>
           <a:xfrm>
-            <a:off x="4490618" y="3108960"/>
+            <a:off x="4490618" y="3246120"/>
             <a:ext cx="3210458" cy="1325880"/>
           </a:xfrm>
           <a:prstGeom prst="rect">
@@ -7965,7 +8433,7 @@
             <a:r>
               <a:rPr sz="3000" b="0" i="0">
                 <a:solidFill>
-                  <a:srgbClr val="2B2B2B"/>
+                  <a:srgbClr val="26231F"/>
                 </a:solidFill>
               </a:rPr>
               <a:t>0원</a:t>
@@ -7975,27 +8443,25 @@
       </p:sp>
       <p:sp>
         <p:nvSpPr>
-          <p:cNvPr id="12" name="카드 3"/>
+          <p:cNvPr id="15" name="카드 3"/>
           <p:cNvSpPr/>
           <p:nvPr/>
         </p:nvSpPr>
         <p:spPr>
           <a:xfrm>
-            <a:off x="8066836" y="1645920"/>
+            <a:off x="8066836" y="1783080"/>
             <a:ext cx="3484778" cy="2926080"/>
           </a:xfrm>
           <a:prstGeom prst="roundRect">
             <a:avLst>
-              <a:gd name="adj" fmla="val 8000"/>
+              <a:gd name="adj" fmla="val 7000"/>
             </a:avLst>
           </a:prstGeom>
           <a:solidFill>
-            <a:srgbClr val="F2F6F8"/>
+            <a:srgbClr val="ECF7FB"/>
           </a:solidFill>
-          <a:ln w="15875">
-            <a:solidFill>
-              <a:srgbClr val="D6E5EA"/>
-            </a:solidFill>
+          <a:ln>
+            <a:noFill/>
           </a:ln>
         </p:spPr>
         <p:txBody>
@@ -8008,23 +8474,23 @@
       </p:sp>
       <p:sp>
         <p:nvSpPr>
-          <p:cNvPr id="13" name="번호 3"/>
+          <p:cNvPr id="16" name="번호 3"/>
           <p:cNvSpPr/>
           <p:nvPr/>
         </p:nvSpPr>
         <p:spPr>
           <a:xfrm>
-            <a:off x="8249716" y="1828800"/>
+            <a:off x="8249716" y="1965960"/>
             <a:ext cx="457200" cy="457200"/>
           </a:xfrm>
           <a:prstGeom prst="ellipse">
             <a:avLst/>
           </a:prstGeom>
-          <a:solidFill>
-            <a:srgbClr val="497483"/>
-          </a:solidFill>
-          <a:ln>
-            <a:noFill/>
+          <a:noFill/>
+          <a:ln w="19050">
+            <a:solidFill>
+              <a:srgbClr val="98CFE1"/>
+            </a:solidFill>
           </a:ln>
         </p:spPr>
         <p:txBody>
@@ -8041,7 +8507,7 @@
             <a:r>
               <a:rPr sz="1600" b="1" i="0">
                 <a:solidFill>
-                  <a:srgbClr val="FFFFFF"/>
+                  <a:srgbClr val="274149"/>
                 </a:solidFill>
               </a:rPr>
               <a:t>3</a:t>
@@ -8051,13 +8517,13 @@
       </p:sp>
       <p:sp>
         <p:nvSpPr>
-          <p:cNvPr id="14" name="TextBox 13"/>
+          <p:cNvPr id="17" name="TextBox 16"/>
           <p:cNvSpPr txBox="1"/>
           <p:nvPr/>
         </p:nvSpPr>
         <p:spPr>
           <a:xfrm>
-            <a:off x="8203996" y="2423160"/>
+            <a:off x="8203996" y="2560320"/>
             <a:ext cx="3210458" cy="640080"/>
           </a:xfrm>
           <a:prstGeom prst="rect">
@@ -8079,7 +8545,7 @@
             <a:r>
               <a:rPr sz="1700" b="1" i="0">
                 <a:solidFill>
-                  <a:srgbClr val="253A41"/>
+                  <a:srgbClr val="274149"/>
                 </a:solidFill>
               </a:rPr>
               <a:t>월 소득 대비</a:t>
@@ -8089,13 +8555,13 @@
       </p:sp>
       <p:sp>
         <p:nvSpPr>
-          <p:cNvPr id="15" name="TextBox 14"/>
+          <p:cNvPr id="18" name="TextBox 17"/>
           <p:cNvSpPr txBox="1"/>
           <p:nvPr/>
         </p:nvSpPr>
         <p:spPr>
           <a:xfrm>
-            <a:off x="8203996" y="3108960"/>
+            <a:off x="8203996" y="3246120"/>
             <a:ext cx="3210458" cy="1325880"/>
           </a:xfrm>
           <a:prstGeom prst="rect">
@@ -8117,7 +8583,7 @@
             <a:r>
               <a:rPr sz="3000" b="0" i="0">
                 <a:solidFill>
-                  <a:srgbClr val="2B2B2B"/>
+                  <a:srgbClr val="26231F"/>
                 </a:solidFill>
               </a:rPr>
               <a:t>0 %</a:t>
@@ -8127,13 +8593,13 @@
       </p:sp>
       <p:sp>
         <p:nvSpPr>
-          <p:cNvPr id="16" name="안내"/>
+          <p:cNvPr id="19" name="안내"/>
           <p:cNvSpPr txBox="1"/>
           <p:nvPr/>
         </p:nvSpPr>
         <p:spPr>
           <a:xfrm>
-            <a:off x="640080" y="4754880"/>
+            <a:off x="640080" y="4892040"/>
             <a:ext cx="10911535" cy="365760"/>
           </a:xfrm>
           <a:prstGeom prst="rect">
@@ -8197,14 +8663,112 @@
         </p:nvSpPr>
         <p:spPr>
           <a:xfrm>
-            <a:off x="0" y="384048"/>
-            <a:ext cx="9509522" cy="896112"/>
-          </a:xfrm>
-          <a:prstGeom prst="homePlate">
+            <a:off x="0" y="6565392"/>
+            <a:ext cx="12191695" cy="292608"/>
+          </a:xfrm>
+          <a:prstGeom prst="rect">
             <a:avLst/>
           </a:prstGeom>
           <a:solidFill>
-            <a:srgbClr val="497483"/>
+            <a:srgbClr val="ADDBEB"/>
+          </a:solidFill>
+          <a:ln>
+            <a:noFill/>
+          </a:ln>
+        </p:spPr>
+        <p:txBody>
+          <a:bodyPr rtlCol="0" anchor="ctr"/>
+          <a:lstStyle/>
+          <a:p>
+            <a:pPr algn="ctr"/>
+          </a:p>
+        </p:txBody>
+      </p:sp>
+      <p:sp>
+        <p:nvSpPr>
+          <p:cNvPr id="4" name="장식"/>
+          <p:cNvSpPr/>
+          <p:nvPr/>
+        </p:nvSpPr>
+        <p:spPr>
+          <a:xfrm>
+            <a:off x="640080" y="566928"/>
+            <a:ext cx="64008" cy="868680"/>
+          </a:xfrm>
+          <a:prstGeom prst="roundRect">
+            <a:avLst>
+              <a:gd name="adj" fmla="val 50000"/>
+            </a:avLst>
+          </a:prstGeom>
+          <a:solidFill>
+            <a:srgbClr val="98CFE1"/>
+          </a:solidFill>
+          <a:ln>
+            <a:noFill/>
+          </a:ln>
+        </p:spPr>
+        <p:txBody>
+          <a:bodyPr rtlCol="0" anchor="ctr"/>
+          <a:lstStyle/>
+          <a:p>
+            <a:pPr algn="ctr"/>
+          </a:p>
+        </p:txBody>
+      </p:sp>
+      <p:sp>
+        <p:nvSpPr>
+          <p:cNvPr id="5" name="상단 라벨"/>
+          <p:cNvSpPr txBox="1"/>
+          <p:nvPr/>
+        </p:nvSpPr>
+        <p:spPr>
+          <a:xfrm>
+            <a:off x="868680" y="274320"/>
+            <a:ext cx="5486400" cy="274320"/>
+          </a:xfrm>
+          <a:prstGeom prst="rect">
+            <a:avLst/>
+          </a:prstGeom>
+          <a:noFill/>
+        </p:spPr>
+        <p:txBody>
+          <a:bodyPr wrap="square" lIns="54864" rIns="54864" tIns="27432" bIns="27432" anchor="ctr">
+            <a:noAutofit/>
+          </a:bodyPr>
+          <a:lstStyle/>
+          <a:p>
+            <a:pPr algn="l">
+              <a:lnSpc>
+                <a:spcPct val="115000"/>
+              </a:lnSpc>
+            </a:pPr>
+            <a:r>
+              <a:rPr sz="900" b="1" i="0" spc="250">
+                <a:solidFill>
+                  <a:srgbClr val="8E8780"/>
+                </a:solidFill>
+              </a:rPr>
+              <a:t>INSURANCE CHECK</a:t>
+            </a:r>
+          </a:p>
+        </p:txBody>
+      </p:sp>
+      <p:sp>
+        <p:nvSpPr>
+          <p:cNvPr id="6" name="포인트"/>
+          <p:cNvSpPr/>
+          <p:nvPr/>
+        </p:nvSpPr>
+        <p:spPr>
+          <a:xfrm rot="18900000">
+            <a:off x="11167567" y="667512"/>
+            <a:ext cx="310896" cy="310896"/>
+          </a:xfrm>
+          <a:prstGeom prst="teardrop">
+            <a:avLst/>
+          </a:prstGeom>
+          <a:solidFill>
+            <a:srgbClr val="ADDBEB"/>
           </a:solidFill>
           <a:ln>
             <a:noFill/>
@@ -8230,8 +8794,8 @@
         </p:nvSpPr>
         <p:spPr>
           <a:xfrm>
-            <a:off x="640080" y="411480"/>
-            <a:ext cx="8412242" cy="822960"/>
+            <a:off x="868680" y="566928"/>
+            <a:ext cx="9448495" cy="868680"/>
           </a:xfrm>
         </p:spPr>
         <p:txBody>
@@ -8248,7 +8812,7 @@
             <a:r>
               <a:rPr sz="3000" b="1" i="0">
                 <a:solidFill>
-                  <a:srgbClr val="FFFFFF"/>
+                  <a:srgbClr val="26231F"/>
                 </a:solidFill>
               </a:rPr>
               <a:t>점검 메모와 다음 할 일</a:t>
@@ -8258,27 +8822,25 @@
       </p:sp>
       <p:sp>
         <p:nvSpPr>
-          <p:cNvPr id="4" name="카드 1"/>
+          <p:cNvPr id="7" name="카드 1"/>
           <p:cNvSpPr/>
           <p:nvPr/>
         </p:nvSpPr>
         <p:spPr>
           <a:xfrm>
-            <a:off x="640080" y="1645920"/>
-            <a:ext cx="3484778" cy="4114800"/>
+            <a:off x="640080" y="1783080"/>
+            <a:ext cx="3484778" cy="3749039"/>
           </a:xfrm>
           <a:prstGeom prst="roundRect">
             <a:avLst>
-              <a:gd name="adj" fmla="val 8000"/>
+              <a:gd name="adj" fmla="val 7000"/>
             </a:avLst>
           </a:prstGeom>
           <a:solidFill>
-            <a:srgbClr val="F2F6F8"/>
+            <a:srgbClr val="ECF7FB"/>
           </a:solidFill>
-          <a:ln w="15875">
-            <a:solidFill>
-              <a:srgbClr val="D6E5EA"/>
-            </a:solidFill>
+          <a:ln>
+            <a:noFill/>
           </a:ln>
         </p:spPr>
         <p:txBody>
@@ -8291,23 +8853,23 @@
       </p:sp>
       <p:sp>
         <p:nvSpPr>
-          <p:cNvPr id="5" name="번호 1"/>
+          <p:cNvPr id="8" name="번호 1"/>
           <p:cNvSpPr/>
           <p:nvPr/>
         </p:nvSpPr>
         <p:spPr>
           <a:xfrm>
-            <a:off x="822959" y="1828800"/>
+            <a:off x="822959" y="1965960"/>
             <a:ext cx="457200" cy="457200"/>
           </a:xfrm>
           <a:prstGeom prst="ellipse">
             <a:avLst/>
           </a:prstGeom>
-          <a:solidFill>
-            <a:srgbClr val="497483"/>
-          </a:solidFill>
-          <a:ln>
-            <a:noFill/>
+          <a:noFill/>
+          <a:ln w="19050">
+            <a:solidFill>
+              <a:srgbClr val="98CFE1"/>
+            </a:solidFill>
           </a:ln>
         </p:spPr>
         <p:txBody>
@@ -8324,7 +8886,7 @@
             <a:r>
               <a:rPr sz="1600" b="1" i="0">
                 <a:solidFill>
-                  <a:srgbClr val="FFFFFF"/>
+                  <a:srgbClr val="274149"/>
                 </a:solidFill>
               </a:rPr>
               <a:t>1</a:t>
@@ -8334,13 +8896,13 @@
       </p:sp>
       <p:sp>
         <p:nvSpPr>
-          <p:cNvPr id="6" name="TextBox 5"/>
+          <p:cNvPr id="9" name="TextBox 8"/>
           <p:cNvSpPr txBox="1"/>
           <p:nvPr/>
         </p:nvSpPr>
         <p:spPr>
           <a:xfrm>
-            <a:off x="777240" y="2423160"/>
+            <a:off x="777240" y="2560320"/>
             <a:ext cx="3210458" cy="640080"/>
           </a:xfrm>
           <a:prstGeom prst="rect">
@@ -8362,7 +8924,7 @@
             <a:r>
               <a:rPr sz="1800" b="1" i="0">
                 <a:solidFill>
-                  <a:srgbClr val="253A41"/>
+                  <a:srgbClr val="274149"/>
                 </a:solidFill>
               </a:rPr>
               <a:t>확인할 것</a:t>
@@ -8372,14 +8934,14 @@
       </p:sp>
       <p:sp>
         <p:nvSpPr>
-          <p:cNvPr id="7" name="TextBox 6"/>
+          <p:cNvPr id="10" name="TextBox 9"/>
           <p:cNvSpPr txBox="1"/>
           <p:nvPr/>
         </p:nvSpPr>
         <p:spPr>
           <a:xfrm>
-            <a:off x="777240" y="3108960"/>
-            <a:ext cx="3210458" cy="2514600"/>
+            <a:off x="777240" y="3246120"/>
+            <a:ext cx="3210458" cy="2148839"/>
           </a:xfrm>
           <a:prstGeom prst="rect">
             <a:avLst/>
@@ -8400,7 +8962,7 @@
             <a:r>
               <a:rPr sz="1500" b="0" i="0">
                 <a:solidFill>
-                  <a:srgbClr val="2B2B2B"/>
+                  <a:srgbClr val="26231F"/>
                 </a:solidFill>
               </a:rPr>
               <a:t>내용을 입력하세요</a:t>
@@ -8410,27 +8972,25 @@
       </p:sp>
       <p:sp>
         <p:nvSpPr>
-          <p:cNvPr id="8" name="카드 2"/>
+          <p:cNvPr id="11" name="카드 2"/>
           <p:cNvSpPr/>
           <p:nvPr/>
         </p:nvSpPr>
         <p:spPr>
           <a:xfrm>
-            <a:off x="4353458" y="1645920"/>
-            <a:ext cx="3484778" cy="4114800"/>
+            <a:off x="4353458" y="1783080"/>
+            <a:ext cx="3484778" cy="3749039"/>
           </a:xfrm>
           <a:prstGeom prst="roundRect">
             <a:avLst>
-              <a:gd name="adj" fmla="val 8000"/>
+              <a:gd name="adj" fmla="val 7000"/>
             </a:avLst>
           </a:prstGeom>
           <a:solidFill>
-            <a:srgbClr val="F2F6F8"/>
+            <a:srgbClr val="ECF7FB"/>
           </a:solidFill>
-          <a:ln w="15875">
-            <a:solidFill>
-              <a:srgbClr val="D6E5EA"/>
-            </a:solidFill>
+          <a:ln>
+            <a:noFill/>
           </a:ln>
         </p:spPr>
         <p:txBody>
@@ -8443,23 +9003,23 @@
       </p:sp>
       <p:sp>
         <p:nvSpPr>
-          <p:cNvPr id="9" name="번호 2"/>
+          <p:cNvPr id="12" name="번호 2"/>
           <p:cNvSpPr/>
           <p:nvPr/>
         </p:nvSpPr>
         <p:spPr>
           <a:xfrm>
-            <a:off x="4536338" y="1828800"/>
+            <a:off x="4536338" y="1965960"/>
             <a:ext cx="457200" cy="457200"/>
           </a:xfrm>
           <a:prstGeom prst="ellipse">
             <a:avLst/>
           </a:prstGeom>
-          <a:solidFill>
-            <a:srgbClr val="497483"/>
-          </a:solidFill>
-          <a:ln>
-            <a:noFill/>
+          <a:noFill/>
+          <a:ln w="19050">
+            <a:solidFill>
+              <a:srgbClr val="98CFE1"/>
+            </a:solidFill>
           </a:ln>
         </p:spPr>
         <p:txBody>
@@ -8476,7 +9036,7 @@
             <a:r>
               <a:rPr sz="1600" b="1" i="0">
                 <a:solidFill>
-                  <a:srgbClr val="FFFFFF"/>
+                  <a:srgbClr val="274149"/>
                 </a:solidFill>
               </a:rPr>
               <a:t>2</a:t>
@@ -8486,13 +9046,13 @@
       </p:sp>
       <p:sp>
         <p:nvSpPr>
-          <p:cNvPr id="10" name="TextBox 9"/>
+          <p:cNvPr id="13" name="TextBox 12"/>
           <p:cNvSpPr txBox="1"/>
           <p:nvPr/>
         </p:nvSpPr>
         <p:spPr>
           <a:xfrm>
-            <a:off x="4490618" y="2423160"/>
+            <a:off x="4490618" y="2560320"/>
             <a:ext cx="3210458" cy="640080"/>
           </a:xfrm>
           <a:prstGeom prst="rect">
@@ -8514,7 +9074,7 @@
             <a:r>
               <a:rPr sz="1800" b="1" i="0">
                 <a:solidFill>
-                  <a:srgbClr val="253A41"/>
+                  <a:srgbClr val="274149"/>
                 </a:solidFill>
               </a:rPr>
               <a:t>문의할 것</a:t>
@@ -8524,14 +9084,14 @@
       </p:sp>
       <p:sp>
         <p:nvSpPr>
-          <p:cNvPr id="11" name="TextBox 10"/>
+          <p:cNvPr id="14" name="TextBox 13"/>
           <p:cNvSpPr txBox="1"/>
           <p:nvPr/>
         </p:nvSpPr>
         <p:spPr>
           <a:xfrm>
-            <a:off x="4490618" y="3108960"/>
-            <a:ext cx="3210458" cy="2514600"/>
+            <a:off x="4490618" y="3246120"/>
+            <a:ext cx="3210458" cy="2148839"/>
           </a:xfrm>
           <a:prstGeom prst="rect">
             <a:avLst/>
@@ -8552,7 +9112,7 @@
             <a:r>
               <a:rPr sz="1500" b="0" i="0">
                 <a:solidFill>
-                  <a:srgbClr val="2B2B2B"/>
+                  <a:srgbClr val="26231F"/>
                 </a:solidFill>
               </a:rPr>
               <a:t>내용을 입력하세요</a:t>
@@ -8562,27 +9122,25 @@
       </p:sp>
       <p:sp>
         <p:nvSpPr>
-          <p:cNvPr id="12" name="카드 3"/>
+          <p:cNvPr id="15" name="카드 3"/>
           <p:cNvSpPr/>
           <p:nvPr/>
         </p:nvSpPr>
         <p:spPr>
           <a:xfrm>
-            <a:off x="8066836" y="1645920"/>
-            <a:ext cx="3484778" cy="4114800"/>
+            <a:off x="8066836" y="1783080"/>
+            <a:ext cx="3484778" cy="3749039"/>
           </a:xfrm>
           <a:prstGeom prst="roundRect">
             <a:avLst>
-              <a:gd name="adj" fmla="val 8000"/>
+              <a:gd name="adj" fmla="val 7000"/>
             </a:avLst>
           </a:prstGeom>
           <a:solidFill>
-            <a:srgbClr val="F2F6F8"/>
+            <a:srgbClr val="ECF7FB"/>
           </a:solidFill>
-          <a:ln w="15875">
-            <a:solidFill>
-              <a:srgbClr val="D6E5EA"/>
-            </a:solidFill>
+          <a:ln>
+            <a:noFill/>
           </a:ln>
         </p:spPr>
         <p:txBody>
@@ -8595,23 +9153,23 @@
       </p:sp>
       <p:sp>
         <p:nvSpPr>
-          <p:cNvPr id="13" name="번호 3"/>
+          <p:cNvPr id="16" name="번호 3"/>
           <p:cNvSpPr/>
           <p:nvPr/>
         </p:nvSpPr>
         <p:spPr>
           <a:xfrm>
-            <a:off x="8249716" y="1828800"/>
+            <a:off x="8249716" y="1965960"/>
             <a:ext cx="457200" cy="457200"/>
           </a:xfrm>
           <a:prstGeom prst="ellipse">
             <a:avLst/>
           </a:prstGeom>
-          <a:solidFill>
-            <a:srgbClr val="497483"/>
-          </a:solidFill>
-          <a:ln>
-            <a:noFill/>
+          <a:noFill/>
+          <a:ln w="19050">
+            <a:solidFill>
+              <a:srgbClr val="98CFE1"/>
+            </a:solidFill>
           </a:ln>
         </p:spPr>
         <p:txBody>
@@ -8628,7 +9186,7 @@
             <a:r>
               <a:rPr sz="1600" b="1" i="0">
                 <a:solidFill>
-                  <a:srgbClr val="FFFFFF"/>
+                  <a:srgbClr val="274149"/>
                 </a:solidFill>
               </a:rPr>
               <a:t>3</a:t>
@@ -8638,13 +9196,13 @@
       </p:sp>
       <p:sp>
         <p:nvSpPr>
-          <p:cNvPr id="14" name="TextBox 13"/>
+          <p:cNvPr id="17" name="TextBox 16"/>
           <p:cNvSpPr txBox="1"/>
           <p:nvPr/>
         </p:nvSpPr>
         <p:spPr>
           <a:xfrm>
-            <a:off x="8203996" y="2423160"/>
+            <a:off x="8203996" y="2560320"/>
             <a:ext cx="3210458" cy="640080"/>
           </a:xfrm>
           <a:prstGeom prst="rect">
@@ -8666,7 +9224,7 @@
             <a:r>
               <a:rPr sz="1800" b="1" i="0">
                 <a:solidFill>
-                  <a:srgbClr val="253A41"/>
+                  <a:srgbClr val="274149"/>
                 </a:solidFill>
               </a:rPr>
               <a:t>정리할 날짜</a:t>
@@ -8676,14 +9234,14 @@
       </p:sp>
       <p:sp>
         <p:nvSpPr>
-          <p:cNvPr id="15" name="TextBox 14"/>
+          <p:cNvPr id="18" name="TextBox 17"/>
           <p:cNvSpPr txBox="1"/>
           <p:nvPr/>
         </p:nvSpPr>
         <p:spPr>
           <a:xfrm>
-            <a:off x="8203996" y="3108960"/>
-            <a:ext cx="3210458" cy="2514600"/>
+            <a:off x="8203996" y="3246120"/>
+            <a:ext cx="3210458" cy="2148839"/>
           </a:xfrm>
           <a:prstGeom prst="rect">
             <a:avLst/>
@@ -8704,7 +9262,7 @@
             <a:r>
               <a:rPr sz="1500" b="0" i="0">
                 <a:solidFill>
-                  <a:srgbClr val="2B2B2B"/>
+                  <a:srgbClr val="26231F"/>
                 </a:solidFill>
               </a:rPr>
               <a:t>내용을 입력하세요</a:t>
@@ -8714,13 +9272,13 @@
       </p:sp>
       <p:sp>
         <p:nvSpPr>
-          <p:cNvPr id="16" name="안내 문구"/>
+          <p:cNvPr id="19" name="안내 문구"/>
           <p:cNvSpPr txBox="1"/>
           <p:nvPr/>
         </p:nvSpPr>
         <p:spPr>
           <a:xfrm>
-            <a:off x="640080" y="5852160"/>
+            <a:off x="640080" y="5623560"/>
             <a:ext cx="10911535" cy="548640"/>
           </a:xfrm>
           <a:prstGeom prst="rect">
@@ -8769,34 +9327,34 @@
         <a:sysClr val="window" lastClr="FFFFFF"/>
       </a:lt1>
       <a:dk2>
-        <a:srgbClr val="253A41"/>
+        <a:srgbClr val="274149"/>
       </a:dk2>
       <a:lt2>
-        <a:srgbClr val="F2F6F8"/>
+        <a:srgbClr val="ECF7FB"/>
       </a:lt2>
       <a:accent1>
-        <a:srgbClr val="497483"/>
+        <a:srgbClr val="98CFE1"/>
       </a:accent1>
       <a:accent2>
-        <a:srgbClr val="834958"/>
+        <a:srgbClr val="B8C6EA"/>
       </a:accent2>
       <a:accent3>
-        <a:srgbClr val="253A41"/>
+        <a:srgbClr val="274149"/>
       </a:accent3>
       <a:accent4>
-        <a:srgbClr val="D6E5EA"/>
+        <a:srgbClr val="D5EEF6"/>
       </a:accent4>
       <a:accent5>
-        <a:srgbClr val="665E6E"/>
+        <a:srgbClr val="A8CAE6"/>
       </a:accent5>
       <a:accent6>
-        <a:srgbClr val="7C898D"/>
+        <a:srgbClr val="7D8D92"/>
       </a:accent6>
       <a:hlink>
-        <a:srgbClr val="497483"/>
+        <a:srgbClr val="98CFE1"/>
       </a:hlink>
       <a:folHlink>
-        <a:srgbClr val="253A41"/>
+        <a:srgbClr val="274149"/>
       </a:folHlink>
     </a:clrScheme>
     <a:fontScheme name="Office">
